--- a/Java個人演習_タイピングテストアプリ_講師向けマニュアル.pptx
+++ b/Java個人演習_タイピングテストアプリ_講師向けマニュアル.pptx
@@ -2,20 +2,20 @@
 <file path=ppt/presentation.xml><?xml version="1.0" encoding="utf-8"?>
 <p:presentation xmlns:p="http://schemas.openxmlformats.org/presentationml/2006/main">
   <p:sldMasterIdLst>
-    <p:sldMasterId xmlns:r="http://schemas.openxmlformats.org/officeDocument/2006/relationships" id="2147483648" r:id="R95e93d689a2648eb"/>
+    <p:sldMasterId xmlns:r="http://schemas.openxmlformats.org/officeDocument/2006/relationships" id="2147483648" r:id="Ra55745cb6b0748a9"/>
   </p:sldMasterIdLst>
   <p:notesMasterIdLst>
-    <p:notesMasterId xmlns:r="http://schemas.openxmlformats.org/officeDocument/2006/relationships" r:id="R656594ac4fb44981"/>
+    <p:notesMasterId xmlns:r="http://schemas.openxmlformats.org/officeDocument/2006/relationships" r:id="R8b2ffd59423445e7"/>
   </p:notesMasterIdLst>
   <p:sldIdLst>
-    <p:sldId xmlns:r="http://schemas.openxmlformats.org/officeDocument/2006/relationships" id="256" r:id="Rdce299eb8f834ee6"/>
-    <p:sldId xmlns:r="http://schemas.openxmlformats.org/officeDocument/2006/relationships" id="257" r:id="Rb890c5ac56804766"/>
-    <p:sldId xmlns:r="http://schemas.openxmlformats.org/officeDocument/2006/relationships" id="258" r:id="R80c029c720bf4891"/>
-    <p:sldId xmlns:r="http://schemas.openxmlformats.org/officeDocument/2006/relationships" id="259" r:id="R5ddf8b9d140448bc"/>
-    <p:sldId xmlns:r="http://schemas.openxmlformats.org/officeDocument/2006/relationships" id="260" r:id="R36197c164dcb4f3f"/>
-    <p:sldId xmlns:r="http://schemas.openxmlformats.org/officeDocument/2006/relationships" id="261" r:id="R1562f905448f4742"/>
-    <p:sldId xmlns:r="http://schemas.openxmlformats.org/officeDocument/2006/relationships" id="262" r:id="R0f2e992f23e64570"/>
-    <p:sldId xmlns:r="http://schemas.openxmlformats.org/officeDocument/2006/relationships" id="263" r:id="R7ca0ad3624014719"/>
+    <p:sldId xmlns:r="http://schemas.openxmlformats.org/officeDocument/2006/relationships" id="256" r:id="R59e2f22b131e4712"/>
+    <p:sldId xmlns:r="http://schemas.openxmlformats.org/officeDocument/2006/relationships" id="257" r:id="Rcbc769be33c049e6"/>
+    <p:sldId xmlns:r="http://schemas.openxmlformats.org/officeDocument/2006/relationships" id="258" r:id="Rb7e4813a32f84f93"/>
+    <p:sldId xmlns:r="http://schemas.openxmlformats.org/officeDocument/2006/relationships" id="259" r:id="Rfa8f15f7133446a0"/>
+    <p:sldId xmlns:r="http://schemas.openxmlformats.org/officeDocument/2006/relationships" id="260" r:id="R50515edc41d849d3"/>
+    <p:sldId xmlns:r="http://schemas.openxmlformats.org/officeDocument/2006/relationships" id="261" r:id="Ree7f5ca91e964404"/>
+    <p:sldId xmlns:r="http://schemas.openxmlformats.org/officeDocument/2006/relationships" id="262" r:id="R901ea2e752344289"/>
+    <p:sldId xmlns:r="http://schemas.openxmlformats.org/officeDocument/2006/relationships" id="263" r:id="R0be29ef48d5741a9"/>
   </p:sldIdLst>
   <p:sldSz cx="12192000" cy="6858000"/>
   <p:notesSz cx="6858000" cy="9144000"/>
@@ -1024,7 +1024,7 @@
   </p:cSld>
   <p:clrMap bg1="lt1" tx1="dk1" bg2="lt2" tx2="dk2" accent1="accent1" accent2="accent2" accent3="accent3" accent4="accent4" accent5="accent5" accent6="accent6" hlink="hlink" folHlink="folHlink"/>
   <p:sldLayoutIdLst>
-    <p:sldLayoutId xmlns:r="http://schemas.openxmlformats.org/officeDocument/2006/relationships" id="2147483649" r:id="R8f51634aad814dcf"/>
+    <p:sldLayoutId xmlns:r="http://schemas.openxmlformats.org/officeDocument/2006/relationships" id="2147483649" r:id="R61698ed1858c4189"/>
   </p:sldLayoutIdLst>
   <p:txStyles>
     <p:titleStyle>
@@ -1323,7 +1323,7 @@
           <p:cNvPr id="1" name="">
             <a:extLst xmlns:a="http://schemas.openxmlformats.org/drawingml/2006/main">
               <a:ext uri="{FF2B5EF4-FFF2-40B4-BE49-F238E27FC236}">
-                <a16:creationId xmlns:a16="http://schemas.microsoft.com/office/drawing/2014/main" id="{0BEF7211-D305-4275-8712-875B57A57FF2}"/>
+                <a16:creationId xmlns:a16="http://schemas.microsoft.com/office/drawing/2014/main" id="{B056476C-B227-4FFC-B7EF-B358FEAAB4EE}"/>
               </a:ext>
             </a:extLst>
           </p:cNvPr>
@@ -1358,7 +1358,7 @@
           <p:cNvPr id="2" name="">
             <a:extLst xmlns:a="http://schemas.openxmlformats.org/drawingml/2006/main">
               <a:ext uri="{FF2B5EF4-FFF2-40B4-BE49-F238E27FC236}">
-                <a16:creationId xmlns:a16="http://schemas.microsoft.com/office/drawing/2014/main" id="{FC456453-6B88-48DA-8B09-0808AFBCCC4D}"/>
+                <a16:creationId xmlns:a16="http://schemas.microsoft.com/office/drawing/2014/main" id="{8789CE6C-C8F7-49B4-9FD7-8D7D6ED67B1B}"/>
               </a:ext>
             </a:extLst>
           </p:cNvPr>
@@ -1393,19 +1393,19 @@
           <p:cNvPr id="3" name="">
             <a:extLst xmlns:a="http://schemas.openxmlformats.org/drawingml/2006/main">
               <a:ext uri="{FF2B5EF4-FFF2-40B4-BE49-F238E27FC236}">
-                <a16:creationId xmlns:a16="http://schemas.microsoft.com/office/drawing/2014/main" id="{43F1480F-C130-405D-A064-15AEF729127C}"/>
-              </a:ext>
-            </a:extLst>
-          </p:cNvPr>
-          <p:cNvSpPr>
-            <a:spLocks xmlns:a="http://schemas.openxmlformats.org/drawingml/2006/main" noGrp="1"/>
-          </p:cNvSpPr>
-          <p:nvPr/>
-        </p:nvSpPr>
-        <p:spPr>
-          <a:xfrm xmlns:a="http://schemas.openxmlformats.org/drawingml/2006/main">
-            <a:off x="723900" y="762000"/>
-            <a:ext cx="4953000" cy="266700"/>
+                <a16:creationId xmlns:a16="http://schemas.microsoft.com/office/drawing/2014/main" id="{6302452A-D3AD-481A-BBAE-5D0B734404B3}"/>
+              </a:ext>
+            </a:extLst>
+          </p:cNvPr>
+          <p:cNvSpPr>
+            <a:spLocks xmlns:a="http://schemas.openxmlformats.org/drawingml/2006/main" noGrp="1"/>
+          </p:cNvSpPr>
+          <p:nvPr/>
+        </p:nvSpPr>
+        <p:spPr>
+          <a:xfrm xmlns:a="http://schemas.openxmlformats.org/drawingml/2006/main">
+            <a:off x="723900" y="685800"/>
+            <a:ext cx="4953000" cy="552450"/>
           </a:xfrm>
           <a:prstGeom xmlns:a="http://schemas.openxmlformats.org/drawingml/2006/main" prst="rect">
             <a:avLst/>
@@ -1447,7 +1447,30 @@
                 <a:ea typeface="Meiryo"/>
                 <a:cs typeface="Meiryo"/>
               </a:rPr>
-              <a:t>Java個人演習「タイピングテストアプリ」</a:t>
+              <a:t>Java個人演習</a:t>
+            </a:r>
+          </a:p>
+          <a:p xmlns:a="http://schemas.openxmlformats.org/drawingml/2006/main">
+            <a:pPr algn="l">
+              <a:defRPr sz="1350" b="1">
+                <a:solidFill>
+                  <a:srgbClr val="9FE2C8"/>
+                </a:solidFill>
+                <a:latin typeface="Meiryo"/>
+                <a:ea typeface="Meiryo"/>
+                <a:cs typeface="Meiryo"/>
+              </a:defRPr>
+            </a:pPr>
+            <a:r>
+              <a:rPr sz="1350" b="1">
+                <a:solidFill>
+                  <a:srgbClr val="9FE2C8"/>
+                </a:solidFill>
+                <a:latin typeface="Meiryo"/>
+                <a:ea typeface="Meiryo"/>
+                <a:cs typeface="Meiryo"/>
+              </a:rPr>
+              <a:t>「タイピングテストアプリ」</a:t>
             </a:r>
           </a:p>
         </p:txBody>
@@ -1457,7 +1480,7 @@
           <p:cNvPr id="4" name="">
             <a:extLst xmlns:a="http://schemas.openxmlformats.org/drawingml/2006/main">
               <a:ext uri="{FF2B5EF4-FFF2-40B4-BE49-F238E27FC236}">
-                <a16:creationId xmlns:a16="http://schemas.microsoft.com/office/drawing/2014/main" id="{97377672-75A4-4991-898C-D9107C60AAD4}"/>
+                <a16:creationId xmlns:a16="http://schemas.microsoft.com/office/drawing/2014/main" id="{6DBBABF3-DA10-4410-B083-C53893A62056}"/>
               </a:ext>
             </a:extLst>
           </p:cNvPr>
@@ -1544,7 +1567,7 @@
           <p:cNvPr id="5" name="">
             <a:extLst xmlns:a="http://schemas.openxmlformats.org/drawingml/2006/main">
               <a:ext uri="{FF2B5EF4-FFF2-40B4-BE49-F238E27FC236}">
-                <a16:creationId xmlns:a16="http://schemas.microsoft.com/office/drawing/2014/main" id="{1B131069-8460-49B8-B368-E587B05FDAFA}"/>
+                <a16:creationId xmlns:a16="http://schemas.microsoft.com/office/drawing/2014/main" id="{8B99A5F0-C4DF-4B9C-A903-030AFA1B4EC7}"/>
               </a:ext>
             </a:extLst>
           </p:cNvPr>
@@ -1608,7 +1631,7 @@
           <p:cNvPr id="6" name="">
             <a:extLst xmlns:a="http://schemas.openxmlformats.org/drawingml/2006/main">
               <a:ext uri="{FF2B5EF4-FFF2-40B4-BE49-F238E27FC236}">
-                <a16:creationId xmlns:a16="http://schemas.microsoft.com/office/drawing/2014/main" id="{EFB1694F-7ACF-495F-BD9B-14ACAD761161}"/>
+                <a16:creationId xmlns:a16="http://schemas.microsoft.com/office/drawing/2014/main" id="{A145976D-F6CF-4911-B189-9F8CEECB6C18}"/>
               </a:ext>
             </a:extLst>
           </p:cNvPr>
@@ -1641,7 +1664,7 @@
           <p:cNvPr id="7" name="">
             <a:extLst xmlns:a="http://schemas.openxmlformats.org/drawingml/2006/main">
               <a:ext uri="{FF2B5EF4-FFF2-40B4-BE49-F238E27FC236}">
-                <a16:creationId xmlns:a16="http://schemas.microsoft.com/office/drawing/2014/main" id="{E00FB834-3ECB-4415-954A-87CB0F1E7059}"/>
+                <a16:creationId xmlns:a16="http://schemas.microsoft.com/office/drawing/2014/main" id="{6266FCD7-9212-475F-8F17-D7C89EB1B5E2}"/>
               </a:ext>
             </a:extLst>
           </p:cNvPr>
@@ -1674,7 +1697,7 @@
           <p:cNvPr id="8" name="">
             <a:extLst xmlns:a="http://schemas.openxmlformats.org/drawingml/2006/main">
               <a:ext uri="{FF2B5EF4-FFF2-40B4-BE49-F238E27FC236}">
-                <a16:creationId xmlns:a16="http://schemas.microsoft.com/office/drawing/2014/main" id="{16071467-8AA1-40AF-B382-2EBA5EF5D84D}"/>
+                <a16:creationId xmlns:a16="http://schemas.microsoft.com/office/drawing/2014/main" id="{AA5D0601-B513-43A8-B38D-E7245C7E806A}"/>
               </a:ext>
             </a:extLst>
           </p:cNvPr>
@@ -1707,7 +1730,7 @@
           <p:cNvPr id="9" name="">
             <a:extLst xmlns:a="http://schemas.openxmlformats.org/drawingml/2006/main">
               <a:ext uri="{FF2B5EF4-FFF2-40B4-BE49-F238E27FC236}">
-                <a16:creationId xmlns:a16="http://schemas.microsoft.com/office/drawing/2014/main" id="{911666FA-E4AB-4D84-86EE-E520175D16B0}"/>
+                <a16:creationId xmlns:a16="http://schemas.microsoft.com/office/drawing/2014/main" id="{8DDD49B4-8628-4508-8099-FFA0F71F3D74}"/>
               </a:ext>
             </a:extLst>
           </p:cNvPr>
@@ -1740,7 +1763,7 @@
           <p:cNvPr id="10" name="">
             <a:extLst xmlns:a="http://schemas.openxmlformats.org/drawingml/2006/main">
               <a:ext uri="{FF2B5EF4-FFF2-40B4-BE49-F238E27FC236}">
-                <a16:creationId xmlns:a16="http://schemas.microsoft.com/office/drawing/2014/main" id="{30341C3F-6423-4BEB-81F0-B1339A9F96F2}"/>
+                <a16:creationId xmlns:a16="http://schemas.microsoft.com/office/drawing/2014/main" id="{32AD67A8-931D-43BB-B5A8-AEB50CF2D965}"/>
               </a:ext>
             </a:extLst>
           </p:cNvPr>
@@ -1773,7 +1796,7 @@
           <p:cNvPr id="11" name="">
             <a:extLst xmlns:a="http://schemas.openxmlformats.org/drawingml/2006/main">
               <a:ext uri="{FF2B5EF4-FFF2-40B4-BE49-F238E27FC236}">
-                <a16:creationId xmlns:a16="http://schemas.microsoft.com/office/drawing/2014/main" id="{D9F430C0-1B69-46C4-9F5F-B6352EB8D9D1}"/>
+                <a16:creationId xmlns:a16="http://schemas.microsoft.com/office/drawing/2014/main" id="{382E15D6-EC21-4DC4-B67F-CB08AC523D6F}"/>
               </a:ext>
             </a:extLst>
           </p:cNvPr>
@@ -1837,7 +1860,7 @@
           <p:cNvPr id="12" name="">
             <a:extLst xmlns:a="http://schemas.openxmlformats.org/drawingml/2006/main">
               <a:ext uri="{FF2B5EF4-FFF2-40B4-BE49-F238E27FC236}">
-                <a16:creationId xmlns:a16="http://schemas.microsoft.com/office/drawing/2014/main" id="{0AB2DF9D-1DEE-4FC0-8B78-A2A4C9C9212C}"/>
+                <a16:creationId xmlns:a16="http://schemas.microsoft.com/office/drawing/2014/main" id="{75E01A97-42D4-44B6-BEB0-82582FD6FDD3}"/>
               </a:ext>
             </a:extLst>
           </p:cNvPr>
@@ -1870,7 +1893,7 @@
           <p:cNvPr id="13" name="">
             <a:extLst xmlns:a="http://schemas.openxmlformats.org/drawingml/2006/main">
               <a:ext uri="{FF2B5EF4-FFF2-40B4-BE49-F238E27FC236}">
-                <a16:creationId xmlns:a16="http://schemas.microsoft.com/office/drawing/2014/main" id="{842C03E6-8F22-4EB1-9D23-3DA489C4C4E3}"/>
+                <a16:creationId xmlns:a16="http://schemas.microsoft.com/office/drawing/2014/main" id="{2BA74CED-5E81-486C-ABDF-E152D337A5EA}"/>
               </a:ext>
             </a:extLst>
           </p:cNvPr>
@@ -1934,7 +1957,7 @@
           <p:cNvPr id="14" name="">
             <a:extLst xmlns:a="http://schemas.openxmlformats.org/drawingml/2006/main">
               <a:ext uri="{FF2B5EF4-FFF2-40B4-BE49-F238E27FC236}">
-                <a16:creationId xmlns:a16="http://schemas.microsoft.com/office/drawing/2014/main" id="{26982845-7D77-48E5-A94D-427BDDA07D5F}"/>
+                <a16:creationId xmlns:a16="http://schemas.microsoft.com/office/drawing/2014/main" id="{14C21973-D405-4946-A0A1-44F154FA5B9D}"/>
               </a:ext>
             </a:extLst>
           </p:cNvPr>
@@ -1967,7 +1990,7 @@
           <p:cNvPr id="15" name="">
             <a:extLst xmlns:a="http://schemas.openxmlformats.org/drawingml/2006/main">
               <a:ext uri="{FF2B5EF4-FFF2-40B4-BE49-F238E27FC236}">
-                <a16:creationId xmlns:a16="http://schemas.microsoft.com/office/drawing/2014/main" id="{2170B7AD-AECC-4E3E-953C-7C63F7198533}"/>
+                <a16:creationId xmlns:a16="http://schemas.microsoft.com/office/drawing/2014/main" id="{32106AF5-025A-48BA-B1A4-B8D2B659898E}"/>
               </a:ext>
             </a:extLst>
           </p:cNvPr>
@@ -2031,7 +2054,7 @@
           <p:cNvPr id="16" name="">
             <a:extLst xmlns:a="http://schemas.openxmlformats.org/drawingml/2006/main">
               <a:ext uri="{FF2B5EF4-FFF2-40B4-BE49-F238E27FC236}">
-                <a16:creationId xmlns:a16="http://schemas.microsoft.com/office/drawing/2014/main" id="{2E3C79AA-FF4B-474B-9408-30A2044BC6B1}"/>
+                <a16:creationId xmlns:a16="http://schemas.microsoft.com/office/drawing/2014/main" id="{551140E4-9EF7-46DD-9CB1-71C1E52C4DF5}"/>
               </a:ext>
             </a:extLst>
           </p:cNvPr>
@@ -2095,7 +2118,7 @@
           <p:cNvPr id="17" name="">
             <a:extLst xmlns:a="http://schemas.openxmlformats.org/drawingml/2006/main">
               <a:ext uri="{FF2B5EF4-FFF2-40B4-BE49-F238E27FC236}">
-                <a16:creationId xmlns:a16="http://schemas.microsoft.com/office/drawing/2014/main" id="{7B956BBA-1503-487B-A840-AD9342FDBB52}"/>
+                <a16:creationId xmlns:a16="http://schemas.microsoft.com/office/drawing/2014/main" id="{70D9FB19-B5A7-4102-9592-48E0855E872E}"/>
               </a:ext>
             </a:extLst>
           </p:cNvPr>
@@ -2155,7 +2178,7 @@
           <p:cNvPr id="18" name="">
             <a:extLst xmlns:a="http://schemas.openxmlformats.org/drawingml/2006/main">
               <a:ext uri="{FF2B5EF4-FFF2-40B4-BE49-F238E27FC236}">
-                <a16:creationId xmlns:a16="http://schemas.microsoft.com/office/drawing/2014/main" id="{893DE507-C632-44B3-9E78-B1D8C0944FA5}"/>
+                <a16:creationId xmlns:a16="http://schemas.microsoft.com/office/drawing/2014/main" id="{B413EC01-184B-4146-A3DB-5E7508841417}"/>
               </a:ext>
             </a:extLst>
           </p:cNvPr>
@@ -2215,7 +2238,7 @@
           <p:cNvPr id="19" name="">
             <a:extLst xmlns:a="http://schemas.openxmlformats.org/drawingml/2006/main">
               <a:ext uri="{FF2B5EF4-FFF2-40B4-BE49-F238E27FC236}">
-                <a16:creationId xmlns:a16="http://schemas.microsoft.com/office/drawing/2014/main" id="{861BB0D1-F807-4451-A31E-166728FA0B52}"/>
+                <a16:creationId xmlns:a16="http://schemas.microsoft.com/office/drawing/2014/main" id="{BCADB4DA-D489-491E-A9F9-825268A811C5}"/>
               </a:ext>
             </a:extLst>
           </p:cNvPr>
@@ -2275,7 +2298,7 @@
           <p:cNvPr id="20" name="">
             <a:extLst xmlns:a="http://schemas.openxmlformats.org/drawingml/2006/main">
               <a:ext uri="{FF2B5EF4-FFF2-40B4-BE49-F238E27FC236}">
-                <a16:creationId xmlns:a16="http://schemas.microsoft.com/office/drawing/2014/main" id="{E7C8538B-8CAE-4205-A5F8-3B037F888085}"/>
+                <a16:creationId xmlns:a16="http://schemas.microsoft.com/office/drawing/2014/main" id="{00729B79-2BC1-4C66-A619-3A3863757DC4}"/>
               </a:ext>
             </a:extLst>
           </p:cNvPr>
@@ -2335,7 +2358,7 @@
           <p:cNvPr id="21" name="">
             <a:extLst xmlns:a="http://schemas.openxmlformats.org/drawingml/2006/main">
               <a:ext uri="{FF2B5EF4-FFF2-40B4-BE49-F238E27FC236}">
-                <a16:creationId xmlns:a16="http://schemas.microsoft.com/office/drawing/2014/main" id="{38ACB0A0-9420-4331-AD21-325C40365BBD}"/>
+                <a16:creationId xmlns:a16="http://schemas.microsoft.com/office/drawing/2014/main" id="{1CC87999-30FC-41C4-8F13-98792BE53D39}"/>
               </a:ext>
             </a:extLst>
           </p:cNvPr>
@@ -2395,7 +2418,7 @@
           <p:cNvPr id="22" name="">
             <a:extLst xmlns:a="http://schemas.openxmlformats.org/drawingml/2006/main">
               <a:ext uri="{FF2B5EF4-FFF2-40B4-BE49-F238E27FC236}">
-                <a16:creationId xmlns:a16="http://schemas.microsoft.com/office/drawing/2014/main" id="{D6A8F55D-4DAD-40F3-BC57-D6F317F8D07D}"/>
+                <a16:creationId xmlns:a16="http://schemas.microsoft.com/office/drawing/2014/main" id="{7069B8D8-0112-449E-972C-A900983C843E}"/>
               </a:ext>
             </a:extLst>
           </p:cNvPr>
@@ -2455,7 +2478,7 @@
           <p:cNvPr id="23" name="">
             <a:extLst xmlns:a="http://schemas.openxmlformats.org/drawingml/2006/main">
               <a:ext uri="{FF2B5EF4-FFF2-40B4-BE49-F238E27FC236}">
-                <a16:creationId xmlns:a16="http://schemas.microsoft.com/office/drawing/2014/main" id="{CB331386-A53C-4CC2-B905-86E1DC5FDA6E}"/>
+                <a16:creationId xmlns:a16="http://schemas.microsoft.com/office/drawing/2014/main" id="{C8476320-2FF2-4811-8DF5-0DA310CD5344}"/>
               </a:ext>
             </a:extLst>
           </p:cNvPr>
@@ -2515,7 +2538,7 @@
           <p:cNvPr id="24" name="">
             <a:extLst xmlns:a="http://schemas.openxmlformats.org/drawingml/2006/main">
               <a:ext uri="{FF2B5EF4-FFF2-40B4-BE49-F238E27FC236}">
-                <a16:creationId xmlns:a16="http://schemas.microsoft.com/office/drawing/2014/main" id="{E4776ABC-714F-4617-962F-E81B7A7628C0}"/>
+                <a16:creationId xmlns:a16="http://schemas.microsoft.com/office/drawing/2014/main" id="{B3426D28-4DAA-4AA1-81B8-987951DAED37}"/>
               </a:ext>
             </a:extLst>
           </p:cNvPr>
@@ -2548,7 +2571,7 @@
           <p:cNvPr id="25" name="">
             <a:extLst xmlns:a="http://schemas.openxmlformats.org/drawingml/2006/main">
               <a:ext uri="{FF2B5EF4-FFF2-40B4-BE49-F238E27FC236}">
-                <a16:creationId xmlns:a16="http://schemas.microsoft.com/office/drawing/2014/main" id="{763C72BD-CCC8-4E97-89FB-A5466B10AD22}"/>
+                <a16:creationId xmlns:a16="http://schemas.microsoft.com/office/drawing/2014/main" id="{59707F03-40A2-43BD-8048-05A27ADE6C9A}"/>
               </a:ext>
             </a:extLst>
           </p:cNvPr>
@@ -2612,7 +2635,7 @@
           <p:cNvPr id="26" name="">
             <a:extLst xmlns:a="http://schemas.openxmlformats.org/drawingml/2006/main">
               <a:ext uri="{FF2B5EF4-FFF2-40B4-BE49-F238E27FC236}">
-                <a16:creationId xmlns:a16="http://schemas.microsoft.com/office/drawing/2014/main" id="{4A4F3BE8-8507-4BD3-9FBF-234DD488A134}"/>
+                <a16:creationId xmlns:a16="http://schemas.microsoft.com/office/drawing/2014/main" id="{8FD05C58-FB49-40EA-8DAE-1E0F8CE19B10}"/>
               </a:ext>
             </a:extLst>
           </p:cNvPr>
@@ -2672,7 +2695,7 @@
           <p:cNvPr id="27" name="">
             <a:extLst xmlns:a="http://schemas.openxmlformats.org/drawingml/2006/main">
               <a:ext uri="{FF2B5EF4-FFF2-40B4-BE49-F238E27FC236}">
-                <a16:creationId xmlns:a16="http://schemas.microsoft.com/office/drawing/2014/main" id="{DEB94EB0-B13D-47F1-99D8-9DEA19A981BE}"/>
+                <a16:creationId xmlns:a16="http://schemas.microsoft.com/office/drawing/2014/main" id="{27767C0F-2082-4188-8403-EC3FCF95C664}"/>
               </a:ext>
             </a:extLst>
           </p:cNvPr>
@@ -2736,7 +2759,7 @@
           <p:cNvPr id="28" name="">
             <a:extLst xmlns:a="http://schemas.openxmlformats.org/drawingml/2006/main">
               <a:ext uri="{FF2B5EF4-FFF2-40B4-BE49-F238E27FC236}">
-                <a16:creationId xmlns:a16="http://schemas.microsoft.com/office/drawing/2014/main" id="{263A1154-22F6-4B4B-8C62-7FFA0D2AD101}"/>
+                <a16:creationId xmlns:a16="http://schemas.microsoft.com/office/drawing/2014/main" id="{A52AE3DD-5296-419B-BFCA-011DA13A3A6D}"/>
               </a:ext>
             </a:extLst>
           </p:cNvPr>
@@ -2798,7 +2821,7 @@
     </p:spTree>
     <p:extLst>
       <p:ext uri="{BB962C8B-B14F-4D97-AF65-F5344CB8AC3E}">
-        <p14:creationId xmlns:p14="http://schemas.microsoft.com/office/powerpoint/2010/main" val="1292762347"/>
+        <p14:creationId xmlns:p14="http://schemas.microsoft.com/office/powerpoint/2010/main" val="174263823"/>
       </p:ext>
     </p:extLst>
   </p:cSld>
@@ -2822,7 +2845,7 @@
           <p:cNvPr id="1" name="">
             <a:extLst xmlns:a="http://schemas.openxmlformats.org/drawingml/2006/main">
               <a:ext uri="{FF2B5EF4-FFF2-40B4-BE49-F238E27FC236}">
-                <a16:creationId xmlns:a16="http://schemas.microsoft.com/office/drawing/2014/main" id="{409E02BA-1E26-4B97-BCDC-CB08E5C2E68C}"/>
+                <a16:creationId xmlns:a16="http://schemas.microsoft.com/office/drawing/2014/main" id="{687D5EED-B4AB-495F-B195-74EF66AB915C}"/>
               </a:ext>
             </a:extLst>
           </p:cNvPr>
@@ -2857,7 +2880,7 @@
           <p:cNvPr id="2" name="">
             <a:extLst xmlns:a="http://schemas.openxmlformats.org/drawingml/2006/main">
               <a:ext uri="{FF2B5EF4-FFF2-40B4-BE49-F238E27FC236}">
-                <a16:creationId xmlns:a16="http://schemas.microsoft.com/office/drawing/2014/main" id="{BC1C1F79-5D50-4FA2-8EAD-0C01D2DD3B36}"/>
+                <a16:creationId xmlns:a16="http://schemas.microsoft.com/office/drawing/2014/main" id="{E9390F64-1C9F-4CD9-B232-B9FF2255222E}"/>
               </a:ext>
             </a:extLst>
           </p:cNvPr>
@@ -2921,7 +2944,7 @@
           <p:cNvPr id="3" name="">
             <a:extLst xmlns:a="http://schemas.openxmlformats.org/drawingml/2006/main">
               <a:ext uri="{FF2B5EF4-FFF2-40B4-BE49-F238E27FC236}">
-                <a16:creationId xmlns:a16="http://schemas.microsoft.com/office/drawing/2014/main" id="{12E272B9-68D8-4197-B843-FD10ECB520A9}"/>
+                <a16:creationId xmlns:a16="http://schemas.microsoft.com/office/drawing/2014/main" id="{157EFD2F-7AFC-4E0B-85A2-6E69F8085EC0}"/>
               </a:ext>
             </a:extLst>
           </p:cNvPr>
@@ -2985,7 +3008,7 @@
           <p:cNvPr id="4" name="">
             <a:extLst xmlns:a="http://schemas.openxmlformats.org/drawingml/2006/main">
               <a:ext uri="{FF2B5EF4-FFF2-40B4-BE49-F238E27FC236}">
-                <a16:creationId xmlns:a16="http://schemas.microsoft.com/office/drawing/2014/main" id="{99A72DD1-DC74-4877-A1B7-1D7846F161D4}"/>
+                <a16:creationId xmlns:a16="http://schemas.microsoft.com/office/drawing/2014/main" id="{2F4967FA-6662-49A3-9022-F24C3DEA0006}"/>
               </a:ext>
             </a:extLst>
           </p:cNvPr>
@@ -3049,7 +3072,7 @@
           <p:cNvPr id="5" name="">
             <a:extLst xmlns:a="http://schemas.openxmlformats.org/drawingml/2006/main">
               <a:ext uri="{FF2B5EF4-FFF2-40B4-BE49-F238E27FC236}">
-                <a16:creationId xmlns:a16="http://schemas.microsoft.com/office/drawing/2014/main" id="{71DD8EA9-1044-4881-8666-5DA9DA1C15FC}"/>
+                <a16:creationId xmlns:a16="http://schemas.microsoft.com/office/drawing/2014/main" id="{917014A3-A8B1-44EC-BB53-191240BCFA4E}"/>
               </a:ext>
             </a:extLst>
           </p:cNvPr>
@@ -3082,7 +3105,7 @@
           <p:cNvPr id="6" name="">
             <a:extLst xmlns:a="http://schemas.openxmlformats.org/drawingml/2006/main">
               <a:ext uri="{FF2B5EF4-FFF2-40B4-BE49-F238E27FC236}">
-                <a16:creationId xmlns:a16="http://schemas.microsoft.com/office/drawing/2014/main" id="{046D120C-DE2E-41F0-ACDE-EF99D5037099}"/>
+                <a16:creationId xmlns:a16="http://schemas.microsoft.com/office/drawing/2014/main" id="{5428D725-DAA2-4535-8635-6DA3C36F60BE}"/>
               </a:ext>
             </a:extLst>
           </p:cNvPr>
@@ -3146,7 +3169,7 @@
           <p:cNvPr id="7" name="">
             <a:extLst xmlns:a="http://schemas.openxmlformats.org/drawingml/2006/main">
               <a:ext uri="{FF2B5EF4-FFF2-40B4-BE49-F238E27FC236}">
-                <a16:creationId xmlns:a16="http://schemas.microsoft.com/office/drawing/2014/main" id="{EB64071D-0098-48D4-A27E-F2B4DF0C392D}"/>
+                <a16:creationId xmlns:a16="http://schemas.microsoft.com/office/drawing/2014/main" id="{701EC558-1A36-4265-8DF4-34CE08B8F3EC}"/>
               </a:ext>
             </a:extLst>
           </p:cNvPr>
@@ -3179,7 +3202,7 @@
           <p:cNvPr id="8" name="">
             <a:extLst xmlns:a="http://schemas.openxmlformats.org/drawingml/2006/main">
               <a:ext uri="{FF2B5EF4-FFF2-40B4-BE49-F238E27FC236}">
-                <a16:creationId xmlns:a16="http://schemas.microsoft.com/office/drawing/2014/main" id="{F75F7CF0-D13E-4FDF-A5D3-0EB1845F1830}"/>
+                <a16:creationId xmlns:a16="http://schemas.microsoft.com/office/drawing/2014/main" id="{3985DBC5-75A7-4102-881B-A6F3ED820A94}"/>
               </a:ext>
             </a:extLst>
           </p:cNvPr>
@@ -3243,7 +3266,7 @@
           <p:cNvPr id="9" name="">
             <a:extLst xmlns:a="http://schemas.openxmlformats.org/drawingml/2006/main">
               <a:ext uri="{FF2B5EF4-FFF2-40B4-BE49-F238E27FC236}">
-                <a16:creationId xmlns:a16="http://schemas.microsoft.com/office/drawing/2014/main" id="{EAD83E48-724A-4010-A06D-B9B471B75627}"/>
+                <a16:creationId xmlns:a16="http://schemas.microsoft.com/office/drawing/2014/main" id="{13720320-528F-472C-BA33-2F2A1EDC92F9}"/>
               </a:ext>
             </a:extLst>
           </p:cNvPr>
@@ -3276,7 +3299,7 @@
           <p:cNvPr id="10" name="">
             <a:extLst xmlns:a="http://schemas.openxmlformats.org/drawingml/2006/main">
               <a:ext uri="{FF2B5EF4-FFF2-40B4-BE49-F238E27FC236}">
-                <a16:creationId xmlns:a16="http://schemas.microsoft.com/office/drawing/2014/main" id="{22C8C8FC-8873-4DFA-B119-632B2382EE36}"/>
+                <a16:creationId xmlns:a16="http://schemas.microsoft.com/office/drawing/2014/main" id="{1B204600-703D-490E-80FA-37FB9EE3345C}"/>
               </a:ext>
             </a:extLst>
           </p:cNvPr>
@@ -3340,7 +3363,7 @@
           <p:cNvPr id="11" name="">
             <a:extLst xmlns:a="http://schemas.openxmlformats.org/drawingml/2006/main">
               <a:ext uri="{FF2B5EF4-FFF2-40B4-BE49-F238E27FC236}">
-                <a16:creationId xmlns:a16="http://schemas.microsoft.com/office/drawing/2014/main" id="{AD6797B0-6AB4-4590-B040-28F5A4122D53}"/>
+                <a16:creationId xmlns:a16="http://schemas.microsoft.com/office/drawing/2014/main" id="{94C25DA4-99C5-4290-AF34-A2DAA151A652}"/>
               </a:ext>
             </a:extLst>
           </p:cNvPr>
@@ -3373,7 +3396,7 @@
           <p:cNvPr id="12" name="">
             <a:extLst xmlns:a="http://schemas.openxmlformats.org/drawingml/2006/main">
               <a:ext uri="{FF2B5EF4-FFF2-40B4-BE49-F238E27FC236}">
-                <a16:creationId xmlns:a16="http://schemas.microsoft.com/office/drawing/2014/main" id="{F3ABE991-F725-4F2C-8108-F0BF6201B60C}"/>
+                <a16:creationId xmlns:a16="http://schemas.microsoft.com/office/drawing/2014/main" id="{1B047B7A-5CB5-4E57-A46C-F87F8C13428B}"/>
               </a:ext>
             </a:extLst>
           </p:cNvPr>
@@ -3437,7 +3460,7 @@
           <p:cNvPr id="13" name="">
             <a:extLst xmlns:a="http://schemas.openxmlformats.org/drawingml/2006/main">
               <a:ext uri="{FF2B5EF4-FFF2-40B4-BE49-F238E27FC236}">
-                <a16:creationId xmlns:a16="http://schemas.microsoft.com/office/drawing/2014/main" id="{7438AE39-F943-4751-A9D7-684F95265F09}"/>
+                <a16:creationId xmlns:a16="http://schemas.microsoft.com/office/drawing/2014/main" id="{719A97B2-7657-42AF-8AEB-A0FE7944CC30}"/>
               </a:ext>
             </a:extLst>
           </p:cNvPr>
@@ -3501,7 +3524,7 @@
           <p:cNvPr id="14" name="">
             <a:extLst xmlns:a="http://schemas.openxmlformats.org/drawingml/2006/main">
               <a:ext uri="{FF2B5EF4-FFF2-40B4-BE49-F238E27FC236}">
-                <a16:creationId xmlns:a16="http://schemas.microsoft.com/office/drawing/2014/main" id="{F4E24357-3D56-426B-83D9-25A50BADB54B}"/>
+                <a16:creationId xmlns:a16="http://schemas.microsoft.com/office/drawing/2014/main" id="{230DA3DA-F0CD-42C7-B345-4C6B003A180C}"/>
               </a:ext>
             </a:extLst>
           </p:cNvPr>
@@ -3534,7 +3557,7 @@
           <p:cNvPr id="15" name="">
             <a:extLst xmlns:a="http://schemas.openxmlformats.org/drawingml/2006/main">
               <a:ext uri="{FF2B5EF4-FFF2-40B4-BE49-F238E27FC236}">
-                <a16:creationId xmlns:a16="http://schemas.microsoft.com/office/drawing/2014/main" id="{64B2BB90-D1AB-48BE-BE90-E86F371A0BD5}"/>
+                <a16:creationId xmlns:a16="http://schemas.microsoft.com/office/drawing/2014/main" id="{86454BCD-C753-4807-8334-541D165C84DC}"/>
               </a:ext>
             </a:extLst>
           </p:cNvPr>
@@ -3598,7 +3621,7 @@
           <p:cNvPr id="16" name="">
             <a:extLst xmlns:a="http://schemas.openxmlformats.org/drawingml/2006/main">
               <a:ext uri="{FF2B5EF4-FFF2-40B4-BE49-F238E27FC236}">
-                <a16:creationId xmlns:a16="http://schemas.microsoft.com/office/drawing/2014/main" id="{33A1EC19-58CF-419C-8C72-B30C22775AD9}"/>
+                <a16:creationId xmlns:a16="http://schemas.microsoft.com/office/drawing/2014/main" id="{23D4D52F-4665-4A7C-AA0E-6C2EA327368E}"/>
               </a:ext>
             </a:extLst>
           </p:cNvPr>
@@ -3631,7 +3654,7 @@
           <p:cNvPr id="17" name="">
             <a:extLst xmlns:a="http://schemas.openxmlformats.org/drawingml/2006/main">
               <a:ext uri="{FF2B5EF4-FFF2-40B4-BE49-F238E27FC236}">
-                <a16:creationId xmlns:a16="http://schemas.microsoft.com/office/drawing/2014/main" id="{76CA7EDF-C4BC-408C-9A89-1D1E7C7CD2CE}"/>
+                <a16:creationId xmlns:a16="http://schemas.microsoft.com/office/drawing/2014/main" id="{38105157-9E00-4A62-BE32-6505149BB7AD}"/>
               </a:ext>
             </a:extLst>
           </p:cNvPr>
@@ -3695,7 +3718,7 @@
           <p:cNvPr id="18" name="">
             <a:extLst xmlns:a="http://schemas.openxmlformats.org/drawingml/2006/main">
               <a:ext uri="{FF2B5EF4-FFF2-40B4-BE49-F238E27FC236}">
-                <a16:creationId xmlns:a16="http://schemas.microsoft.com/office/drawing/2014/main" id="{BD7EFE2E-2ACF-411A-8169-28061C3D55DD}"/>
+                <a16:creationId xmlns:a16="http://schemas.microsoft.com/office/drawing/2014/main" id="{BD7F4121-0D81-4FB2-A3F9-C0164E8FCDD4}"/>
               </a:ext>
             </a:extLst>
           </p:cNvPr>
@@ -3728,7 +3751,7 @@
           <p:cNvPr id="19" name="">
             <a:extLst xmlns:a="http://schemas.openxmlformats.org/drawingml/2006/main">
               <a:ext uri="{FF2B5EF4-FFF2-40B4-BE49-F238E27FC236}">
-                <a16:creationId xmlns:a16="http://schemas.microsoft.com/office/drawing/2014/main" id="{E19B6DA6-BF9F-4C78-B0ED-B9ED2BFB0C1B}"/>
+                <a16:creationId xmlns:a16="http://schemas.microsoft.com/office/drawing/2014/main" id="{3B644317-C818-4EBD-986E-1C99E35F372A}"/>
               </a:ext>
             </a:extLst>
           </p:cNvPr>
@@ -3792,7 +3815,7 @@
           <p:cNvPr id="20" name="">
             <a:extLst xmlns:a="http://schemas.openxmlformats.org/drawingml/2006/main">
               <a:ext uri="{FF2B5EF4-FFF2-40B4-BE49-F238E27FC236}">
-                <a16:creationId xmlns:a16="http://schemas.microsoft.com/office/drawing/2014/main" id="{814FA7A8-9DF5-4ADE-BD58-6B9591CA8994}"/>
+                <a16:creationId xmlns:a16="http://schemas.microsoft.com/office/drawing/2014/main" id="{6FBD25ED-3A04-4C90-8487-E7347F21697F}"/>
               </a:ext>
             </a:extLst>
           </p:cNvPr>
@@ -3825,7 +3848,7 @@
           <p:cNvPr id="21" name="">
             <a:extLst xmlns:a="http://schemas.openxmlformats.org/drawingml/2006/main">
               <a:ext uri="{FF2B5EF4-FFF2-40B4-BE49-F238E27FC236}">
-                <a16:creationId xmlns:a16="http://schemas.microsoft.com/office/drawing/2014/main" id="{BEBEF02D-E7B7-4838-A0EA-43DED75E1912}"/>
+                <a16:creationId xmlns:a16="http://schemas.microsoft.com/office/drawing/2014/main" id="{762F306A-79DC-4CD9-AD61-404CA5A5E914}"/>
               </a:ext>
             </a:extLst>
           </p:cNvPr>
@@ -3889,7 +3912,7 @@
           <p:cNvPr id="22" name="">
             <a:extLst xmlns:a="http://schemas.openxmlformats.org/drawingml/2006/main">
               <a:ext uri="{FF2B5EF4-FFF2-40B4-BE49-F238E27FC236}">
-                <a16:creationId xmlns:a16="http://schemas.microsoft.com/office/drawing/2014/main" id="{823AD23C-1EF8-4549-B499-E7B1C1A588BE}"/>
+                <a16:creationId xmlns:a16="http://schemas.microsoft.com/office/drawing/2014/main" id="{A468288A-6EA1-442F-B893-13CD72B2E63F}"/>
               </a:ext>
             </a:extLst>
           </p:cNvPr>
@@ -3951,7 +3974,7 @@
     </p:spTree>
     <p:extLst>
       <p:ext uri="{BB962C8B-B14F-4D97-AF65-F5344CB8AC3E}">
-        <p14:creationId xmlns:p14="http://schemas.microsoft.com/office/powerpoint/2010/main" val="517832561"/>
+        <p14:creationId xmlns:p14="http://schemas.microsoft.com/office/powerpoint/2010/main" val="1626879223"/>
       </p:ext>
     </p:extLst>
   </p:cSld>
@@ -3975,7 +3998,7 @@
           <p:cNvPr id="1" name="">
             <a:extLst xmlns:a="http://schemas.openxmlformats.org/drawingml/2006/main">
               <a:ext uri="{FF2B5EF4-FFF2-40B4-BE49-F238E27FC236}">
-                <a16:creationId xmlns:a16="http://schemas.microsoft.com/office/drawing/2014/main" id="{06B62C85-9BE4-4218-B6EF-8BEB4BD9D90E}"/>
+                <a16:creationId xmlns:a16="http://schemas.microsoft.com/office/drawing/2014/main" id="{1EFAC012-3C31-4B30-B16F-8AEC21D66C45}"/>
               </a:ext>
             </a:extLst>
           </p:cNvPr>
@@ -4010,7 +4033,7 @@
           <p:cNvPr id="2" name="">
             <a:extLst xmlns:a="http://schemas.openxmlformats.org/drawingml/2006/main">
               <a:ext uri="{FF2B5EF4-FFF2-40B4-BE49-F238E27FC236}">
-                <a16:creationId xmlns:a16="http://schemas.microsoft.com/office/drawing/2014/main" id="{3336514C-7B93-4033-8388-4367B0045CB4}"/>
+                <a16:creationId xmlns:a16="http://schemas.microsoft.com/office/drawing/2014/main" id="{E8AA3EF4-CB44-428F-BB1E-9FFFFA69139B}"/>
               </a:ext>
             </a:extLst>
           </p:cNvPr>
@@ -4074,7 +4097,7 @@
           <p:cNvPr id="3" name="">
             <a:extLst xmlns:a="http://schemas.openxmlformats.org/drawingml/2006/main">
               <a:ext uri="{FF2B5EF4-FFF2-40B4-BE49-F238E27FC236}">
-                <a16:creationId xmlns:a16="http://schemas.microsoft.com/office/drawing/2014/main" id="{F092BACD-AD2D-4921-A34F-22B2844DC315}"/>
+                <a16:creationId xmlns:a16="http://schemas.microsoft.com/office/drawing/2014/main" id="{B0A5338F-8115-4E9C-978E-022D370B3B33}"/>
               </a:ext>
             </a:extLst>
           </p:cNvPr>
@@ -4138,7 +4161,7 @@
           <p:cNvPr id="4" name="">
             <a:extLst xmlns:a="http://schemas.openxmlformats.org/drawingml/2006/main">
               <a:ext uri="{FF2B5EF4-FFF2-40B4-BE49-F238E27FC236}">
-                <a16:creationId xmlns:a16="http://schemas.microsoft.com/office/drawing/2014/main" id="{2302A703-DB18-483A-BED6-54267DF8DB82}"/>
+                <a16:creationId xmlns:a16="http://schemas.microsoft.com/office/drawing/2014/main" id="{CE1A7E04-2E92-4D32-8457-EF6D22D4706C}"/>
               </a:ext>
             </a:extLst>
           </p:cNvPr>
@@ -4202,7 +4225,7 @@
           <p:cNvPr id="5" name="">
             <a:extLst xmlns:a="http://schemas.openxmlformats.org/drawingml/2006/main">
               <a:ext uri="{FF2B5EF4-FFF2-40B4-BE49-F238E27FC236}">
-                <a16:creationId xmlns:a16="http://schemas.microsoft.com/office/drawing/2014/main" id="{BE03F027-EB04-4364-A898-E4E51C43C042}"/>
+                <a16:creationId xmlns:a16="http://schemas.microsoft.com/office/drawing/2014/main" id="{D3577366-23FF-45F9-B929-1A2CBEF6C401}"/>
               </a:ext>
             </a:extLst>
           </p:cNvPr>
@@ -4235,7 +4258,7 @@
           <p:cNvPr id="6" name="">
             <a:extLst xmlns:a="http://schemas.openxmlformats.org/drawingml/2006/main">
               <a:ext uri="{FF2B5EF4-FFF2-40B4-BE49-F238E27FC236}">
-                <a16:creationId xmlns:a16="http://schemas.microsoft.com/office/drawing/2014/main" id="{A189DAA1-45D2-4078-A12D-351E61149BFF}"/>
+                <a16:creationId xmlns:a16="http://schemas.microsoft.com/office/drawing/2014/main" id="{D6026A32-8A98-4D45-9CBF-2970C4545E1E}"/>
               </a:ext>
             </a:extLst>
           </p:cNvPr>
@@ -4268,7 +4291,7 @@
           <p:cNvPr id="7" name="">
             <a:extLst xmlns:a="http://schemas.openxmlformats.org/drawingml/2006/main">
               <a:ext uri="{FF2B5EF4-FFF2-40B4-BE49-F238E27FC236}">
-                <a16:creationId xmlns:a16="http://schemas.microsoft.com/office/drawing/2014/main" id="{8CE13EA8-DAD3-4143-8443-04749F96F619}"/>
+                <a16:creationId xmlns:a16="http://schemas.microsoft.com/office/drawing/2014/main" id="{048CFE76-4B31-4569-B4C8-054D0B4EEB7F}"/>
               </a:ext>
             </a:extLst>
           </p:cNvPr>
@@ -4301,7 +4324,7 @@
           <p:cNvPr id="8" name="">
             <a:extLst xmlns:a="http://schemas.openxmlformats.org/drawingml/2006/main">
               <a:ext uri="{FF2B5EF4-FFF2-40B4-BE49-F238E27FC236}">
-                <a16:creationId xmlns:a16="http://schemas.microsoft.com/office/drawing/2014/main" id="{AF442F2D-4E1F-44F9-82B9-61320E29527C}"/>
+                <a16:creationId xmlns:a16="http://schemas.microsoft.com/office/drawing/2014/main" id="{9BD5F265-EBCE-448A-8C1A-F9D834A786C6}"/>
               </a:ext>
             </a:extLst>
           </p:cNvPr>
@@ -4334,7 +4357,7 @@
           <p:cNvPr id="9" name="">
             <a:extLst xmlns:a="http://schemas.openxmlformats.org/drawingml/2006/main">
               <a:ext uri="{FF2B5EF4-FFF2-40B4-BE49-F238E27FC236}">
-                <a16:creationId xmlns:a16="http://schemas.microsoft.com/office/drawing/2014/main" id="{21A50E24-3DDB-4E00-B78C-6CF14EB4E0B7}"/>
+                <a16:creationId xmlns:a16="http://schemas.microsoft.com/office/drawing/2014/main" id="{499309F9-B741-4245-8859-05CA0D397CDE}"/>
               </a:ext>
             </a:extLst>
           </p:cNvPr>
@@ -4367,7 +4390,7 @@
           <p:cNvPr id="10" name="">
             <a:extLst xmlns:a="http://schemas.openxmlformats.org/drawingml/2006/main">
               <a:ext uri="{FF2B5EF4-FFF2-40B4-BE49-F238E27FC236}">
-                <a16:creationId xmlns:a16="http://schemas.microsoft.com/office/drawing/2014/main" id="{43F8F67F-0662-48FA-83CC-C36BCA9393BA}"/>
+                <a16:creationId xmlns:a16="http://schemas.microsoft.com/office/drawing/2014/main" id="{630F76F3-756C-4278-B434-0D831EB8F8A1}"/>
               </a:ext>
             </a:extLst>
           </p:cNvPr>
@@ -4400,7 +4423,7 @@
           <p:cNvPr id="11" name="">
             <a:extLst xmlns:a="http://schemas.openxmlformats.org/drawingml/2006/main">
               <a:ext uri="{FF2B5EF4-FFF2-40B4-BE49-F238E27FC236}">
-                <a16:creationId xmlns:a16="http://schemas.microsoft.com/office/drawing/2014/main" id="{5F6E26E7-0763-4EEA-9F8C-EF0DCB226A19}"/>
+                <a16:creationId xmlns:a16="http://schemas.microsoft.com/office/drawing/2014/main" id="{25A2DC58-32A5-4C3F-9DFB-5F20026DAB4D}"/>
               </a:ext>
             </a:extLst>
           </p:cNvPr>
@@ -4464,7 +4487,7 @@
           <p:cNvPr id="12" name="">
             <a:extLst xmlns:a="http://schemas.openxmlformats.org/drawingml/2006/main">
               <a:ext uri="{FF2B5EF4-FFF2-40B4-BE49-F238E27FC236}">
-                <a16:creationId xmlns:a16="http://schemas.microsoft.com/office/drawing/2014/main" id="{C09A7085-3F2D-437D-8683-2567096C96EA}"/>
+                <a16:creationId xmlns:a16="http://schemas.microsoft.com/office/drawing/2014/main" id="{8090F5D3-4906-4556-A8F1-875EC6ED44C8}"/>
               </a:ext>
             </a:extLst>
           </p:cNvPr>
@@ -4497,7 +4520,7 @@
           <p:cNvPr id="13" name="">
             <a:extLst xmlns:a="http://schemas.openxmlformats.org/drawingml/2006/main">
               <a:ext uri="{FF2B5EF4-FFF2-40B4-BE49-F238E27FC236}">
-                <a16:creationId xmlns:a16="http://schemas.microsoft.com/office/drawing/2014/main" id="{5DC62EF5-5646-4E0E-9182-EF2D83292121}"/>
+                <a16:creationId xmlns:a16="http://schemas.microsoft.com/office/drawing/2014/main" id="{D12570B5-DA79-494E-8FA7-72C89D660ACC}"/>
               </a:ext>
             </a:extLst>
           </p:cNvPr>
@@ -4561,7 +4584,7 @@
           <p:cNvPr id="14" name="">
             <a:extLst xmlns:a="http://schemas.openxmlformats.org/drawingml/2006/main">
               <a:ext uri="{FF2B5EF4-FFF2-40B4-BE49-F238E27FC236}">
-                <a16:creationId xmlns:a16="http://schemas.microsoft.com/office/drawing/2014/main" id="{5CBF6DCC-B5B4-4BA4-8566-F7F76C225DB9}"/>
+                <a16:creationId xmlns:a16="http://schemas.microsoft.com/office/drawing/2014/main" id="{BC9FDFBE-51D4-4C25-88D7-0456A6400D74}"/>
               </a:ext>
             </a:extLst>
           </p:cNvPr>
@@ -4594,7 +4617,7 @@
           <p:cNvPr id="15" name="">
             <a:extLst xmlns:a="http://schemas.openxmlformats.org/drawingml/2006/main">
               <a:ext uri="{FF2B5EF4-FFF2-40B4-BE49-F238E27FC236}">
-                <a16:creationId xmlns:a16="http://schemas.microsoft.com/office/drawing/2014/main" id="{2FA41606-4B01-4740-8243-530E86A24DEA}"/>
+                <a16:creationId xmlns:a16="http://schemas.microsoft.com/office/drawing/2014/main" id="{25547EB6-5015-40F6-92A6-ADF7F99BA25C}"/>
               </a:ext>
             </a:extLst>
           </p:cNvPr>
@@ -4658,7 +4681,7 @@
           <p:cNvPr id="16" name="">
             <a:extLst xmlns:a="http://schemas.openxmlformats.org/drawingml/2006/main">
               <a:ext uri="{FF2B5EF4-FFF2-40B4-BE49-F238E27FC236}">
-                <a16:creationId xmlns:a16="http://schemas.microsoft.com/office/drawing/2014/main" id="{834EBC91-3E13-4BA8-B7BF-60060DF317CB}"/>
+                <a16:creationId xmlns:a16="http://schemas.microsoft.com/office/drawing/2014/main" id="{EEDB5075-AA70-42D7-8CB9-594A5ED63657}"/>
               </a:ext>
             </a:extLst>
           </p:cNvPr>
@@ -4722,7 +4745,7 @@
           <p:cNvPr id="17" name="">
             <a:extLst xmlns:a="http://schemas.openxmlformats.org/drawingml/2006/main">
               <a:ext uri="{FF2B5EF4-FFF2-40B4-BE49-F238E27FC236}">
-                <a16:creationId xmlns:a16="http://schemas.microsoft.com/office/drawing/2014/main" id="{5ED08857-96BF-42C6-B2A4-CF854028C7CB}"/>
+                <a16:creationId xmlns:a16="http://schemas.microsoft.com/office/drawing/2014/main" id="{18681917-1FB5-483C-8183-0683CDCD93CA}"/>
               </a:ext>
             </a:extLst>
           </p:cNvPr>
@@ -4782,7 +4805,7 @@
           <p:cNvPr id="18" name="">
             <a:extLst xmlns:a="http://schemas.openxmlformats.org/drawingml/2006/main">
               <a:ext uri="{FF2B5EF4-FFF2-40B4-BE49-F238E27FC236}">
-                <a16:creationId xmlns:a16="http://schemas.microsoft.com/office/drawing/2014/main" id="{E3EA16A1-48A8-4555-8126-F6B210C34F8F}"/>
+                <a16:creationId xmlns:a16="http://schemas.microsoft.com/office/drawing/2014/main" id="{6AE0F567-8758-4D99-803A-EE59A67CD5A4}"/>
               </a:ext>
             </a:extLst>
           </p:cNvPr>
@@ -4842,7 +4865,7 @@
           <p:cNvPr id="19" name="">
             <a:extLst xmlns:a="http://schemas.openxmlformats.org/drawingml/2006/main">
               <a:ext uri="{FF2B5EF4-FFF2-40B4-BE49-F238E27FC236}">
-                <a16:creationId xmlns:a16="http://schemas.microsoft.com/office/drawing/2014/main" id="{D0FDF29E-A675-4349-96BC-1A898D8336B8}"/>
+                <a16:creationId xmlns:a16="http://schemas.microsoft.com/office/drawing/2014/main" id="{B5075914-A29C-41E6-8B5C-B998740E58AF}"/>
               </a:ext>
             </a:extLst>
           </p:cNvPr>
@@ -4902,7 +4925,7 @@
           <p:cNvPr id="20" name="">
             <a:extLst xmlns:a="http://schemas.openxmlformats.org/drawingml/2006/main">
               <a:ext uri="{FF2B5EF4-FFF2-40B4-BE49-F238E27FC236}">
-                <a16:creationId xmlns:a16="http://schemas.microsoft.com/office/drawing/2014/main" id="{89A042FA-9E68-4A42-B58F-F3406BEE37EB}"/>
+                <a16:creationId xmlns:a16="http://schemas.microsoft.com/office/drawing/2014/main" id="{B72DB7D7-8ED3-411D-AB96-B423531E9ADC}"/>
               </a:ext>
             </a:extLst>
           </p:cNvPr>
@@ -4962,7 +4985,7 @@
           <p:cNvPr id="21" name="">
             <a:extLst xmlns:a="http://schemas.openxmlformats.org/drawingml/2006/main">
               <a:ext uri="{FF2B5EF4-FFF2-40B4-BE49-F238E27FC236}">
-                <a16:creationId xmlns:a16="http://schemas.microsoft.com/office/drawing/2014/main" id="{4E29901F-2E91-41D2-8C18-210CF796E215}"/>
+                <a16:creationId xmlns:a16="http://schemas.microsoft.com/office/drawing/2014/main" id="{542099FF-09BC-45B8-8844-7E3A18B67EB0}"/>
               </a:ext>
             </a:extLst>
           </p:cNvPr>
@@ -5022,7 +5045,7 @@
           <p:cNvPr id="22" name="">
             <a:extLst xmlns:a="http://schemas.openxmlformats.org/drawingml/2006/main">
               <a:ext uri="{FF2B5EF4-FFF2-40B4-BE49-F238E27FC236}">
-                <a16:creationId xmlns:a16="http://schemas.microsoft.com/office/drawing/2014/main" id="{C9E47E36-E27F-4732-BD77-892B6C2A95C7}"/>
+                <a16:creationId xmlns:a16="http://schemas.microsoft.com/office/drawing/2014/main" id="{011F583B-49EE-485A-883E-7F3841398197}"/>
               </a:ext>
             </a:extLst>
           </p:cNvPr>
@@ -5082,7 +5105,7 @@
           <p:cNvPr id="23" name="">
             <a:extLst xmlns:a="http://schemas.openxmlformats.org/drawingml/2006/main">
               <a:ext uri="{FF2B5EF4-FFF2-40B4-BE49-F238E27FC236}">
-                <a16:creationId xmlns:a16="http://schemas.microsoft.com/office/drawing/2014/main" id="{BF6C549C-5454-465E-B035-1AA895CC3EE5}"/>
+                <a16:creationId xmlns:a16="http://schemas.microsoft.com/office/drawing/2014/main" id="{3DB92568-6CA6-4A13-8F8D-1649736C03ED}"/>
               </a:ext>
             </a:extLst>
           </p:cNvPr>
@@ -5142,7 +5165,7 @@
           <p:cNvPr id="24" name="">
             <a:extLst xmlns:a="http://schemas.openxmlformats.org/drawingml/2006/main">
               <a:ext uri="{FF2B5EF4-FFF2-40B4-BE49-F238E27FC236}">
-                <a16:creationId xmlns:a16="http://schemas.microsoft.com/office/drawing/2014/main" id="{11099B90-1658-4AED-BF6E-B9CA565CB950}"/>
+                <a16:creationId xmlns:a16="http://schemas.microsoft.com/office/drawing/2014/main" id="{CA5578B1-D044-47C8-A7FC-EDAEF398CA19}"/>
               </a:ext>
             </a:extLst>
           </p:cNvPr>
@@ -5175,7 +5198,7 @@
           <p:cNvPr id="25" name="">
             <a:extLst xmlns:a="http://schemas.openxmlformats.org/drawingml/2006/main">
               <a:ext uri="{FF2B5EF4-FFF2-40B4-BE49-F238E27FC236}">
-                <a16:creationId xmlns:a16="http://schemas.microsoft.com/office/drawing/2014/main" id="{DD22FAE1-F43F-4B79-B3A9-557A2C367DE8}"/>
+                <a16:creationId xmlns:a16="http://schemas.microsoft.com/office/drawing/2014/main" id="{E3EE16B6-8FBB-4E78-AC98-4D943D91280A}"/>
               </a:ext>
             </a:extLst>
           </p:cNvPr>
@@ -5239,7 +5262,7 @@
           <p:cNvPr id="26" name="">
             <a:extLst xmlns:a="http://schemas.openxmlformats.org/drawingml/2006/main">
               <a:ext uri="{FF2B5EF4-FFF2-40B4-BE49-F238E27FC236}">
-                <a16:creationId xmlns:a16="http://schemas.microsoft.com/office/drawing/2014/main" id="{23EFFA8C-BB61-4AA9-AE13-FA41B2A7C547}"/>
+                <a16:creationId xmlns:a16="http://schemas.microsoft.com/office/drawing/2014/main" id="{F35E93B9-0378-424B-B563-12BC13FC7EC2}"/>
               </a:ext>
             </a:extLst>
           </p:cNvPr>
@@ -5299,7 +5322,7 @@
           <p:cNvPr id="27" name="">
             <a:extLst xmlns:a="http://schemas.openxmlformats.org/drawingml/2006/main">
               <a:ext uri="{FF2B5EF4-FFF2-40B4-BE49-F238E27FC236}">
-                <a16:creationId xmlns:a16="http://schemas.microsoft.com/office/drawing/2014/main" id="{46C07DF6-3F7F-4A19-A23D-04F1C0A84CA6}"/>
+                <a16:creationId xmlns:a16="http://schemas.microsoft.com/office/drawing/2014/main" id="{2B7C7AAC-E938-4B89-8272-B5AA80253E4A}"/>
               </a:ext>
             </a:extLst>
           </p:cNvPr>
@@ -5363,7 +5386,7 @@
           <p:cNvPr id="28" name="">
             <a:extLst xmlns:a="http://schemas.openxmlformats.org/drawingml/2006/main">
               <a:ext uri="{FF2B5EF4-FFF2-40B4-BE49-F238E27FC236}">
-                <a16:creationId xmlns:a16="http://schemas.microsoft.com/office/drawing/2014/main" id="{D7E1CA0B-D6F1-461A-AC25-3EEB888077AE}"/>
+                <a16:creationId xmlns:a16="http://schemas.microsoft.com/office/drawing/2014/main" id="{CD3AA4C3-0AA5-47C7-980D-F21C91ECEEDC}"/>
               </a:ext>
             </a:extLst>
           </p:cNvPr>
@@ -5396,7 +5419,7 @@
           <p:cNvPr id="29" name="">
             <a:extLst xmlns:a="http://schemas.openxmlformats.org/drawingml/2006/main">
               <a:ext uri="{FF2B5EF4-FFF2-40B4-BE49-F238E27FC236}">
-                <a16:creationId xmlns:a16="http://schemas.microsoft.com/office/drawing/2014/main" id="{705C3581-476B-4E4F-A7A6-0F32F7B822E6}"/>
+                <a16:creationId xmlns:a16="http://schemas.microsoft.com/office/drawing/2014/main" id="{11A96A81-7E67-43D8-9869-ED738B1611B1}"/>
               </a:ext>
             </a:extLst>
           </p:cNvPr>
@@ -5460,7 +5483,7 @@
           <p:cNvPr id="30" name="">
             <a:extLst xmlns:a="http://schemas.openxmlformats.org/drawingml/2006/main">
               <a:ext uri="{FF2B5EF4-FFF2-40B4-BE49-F238E27FC236}">
-                <a16:creationId xmlns:a16="http://schemas.microsoft.com/office/drawing/2014/main" id="{076E898F-E40E-4521-921B-77F96FF96884}"/>
+                <a16:creationId xmlns:a16="http://schemas.microsoft.com/office/drawing/2014/main" id="{0C67474D-C165-42C2-9E0A-3E5A202C42AE}"/>
               </a:ext>
             </a:extLst>
           </p:cNvPr>
@@ -5520,7 +5543,7 @@
           <p:cNvPr id="31" name="">
             <a:extLst xmlns:a="http://schemas.openxmlformats.org/drawingml/2006/main">
               <a:ext uri="{FF2B5EF4-FFF2-40B4-BE49-F238E27FC236}">
-                <a16:creationId xmlns:a16="http://schemas.microsoft.com/office/drawing/2014/main" id="{76B1912E-305A-4E5E-8338-8E90FD0FB707}"/>
+                <a16:creationId xmlns:a16="http://schemas.microsoft.com/office/drawing/2014/main" id="{B3A4E579-1C33-4460-84F4-B3603B10636E}"/>
               </a:ext>
             </a:extLst>
           </p:cNvPr>
@@ -5603,7 +5626,7 @@
           <p:cNvPr id="32" name="">
             <a:extLst xmlns:a="http://schemas.openxmlformats.org/drawingml/2006/main">
               <a:ext uri="{FF2B5EF4-FFF2-40B4-BE49-F238E27FC236}">
-                <a16:creationId xmlns:a16="http://schemas.microsoft.com/office/drawing/2014/main" id="{17AB2A56-8FFC-4324-AE84-976D259549BF}"/>
+                <a16:creationId xmlns:a16="http://schemas.microsoft.com/office/drawing/2014/main" id="{0D5750D1-4BBD-4607-B0ED-83BCE7CC964D}"/>
               </a:ext>
             </a:extLst>
           </p:cNvPr>
@@ -5667,7 +5690,7 @@
           <p:cNvPr id="33" name="">
             <a:extLst xmlns:a="http://schemas.openxmlformats.org/drawingml/2006/main">
               <a:ext uri="{FF2B5EF4-FFF2-40B4-BE49-F238E27FC236}">
-                <a16:creationId xmlns:a16="http://schemas.microsoft.com/office/drawing/2014/main" id="{53CF5893-9E64-405D-AE7A-5936A65220D9}"/>
+                <a16:creationId xmlns:a16="http://schemas.microsoft.com/office/drawing/2014/main" id="{8CE6787C-DC51-4C10-9CA2-6D80CE382FE3}"/>
               </a:ext>
             </a:extLst>
           </p:cNvPr>
@@ -5700,7 +5723,7 @@
           <p:cNvPr id="34" name="">
             <a:extLst xmlns:a="http://schemas.openxmlformats.org/drawingml/2006/main">
               <a:ext uri="{FF2B5EF4-FFF2-40B4-BE49-F238E27FC236}">
-                <a16:creationId xmlns:a16="http://schemas.microsoft.com/office/drawing/2014/main" id="{B329CC4F-F340-4A47-A286-8C9EDAC1CCE6}"/>
+                <a16:creationId xmlns:a16="http://schemas.microsoft.com/office/drawing/2014/main" id="{17417CB3-B96C-4419-B6E4-5800C43549D0}"/>
               </a:ext>
             </a:extLst>
           </p:cNvPr>
@@ -5764,7 +5787,7 @@
           <p:cNvPr id="35" name="">
             <a:extLst xmlns:a="http://schemas.openxmlformats.org/drawingml/2006/main">
               <a:ext uri="{FF2B5EF4-FFF2-40B4-BE49-F238E27FC236}">
-                <a16:creationId xmlns:a16="http://schemas.microsoft.com/office/drawing/2014/main" id="{2BB2B81B-28AD-47BA-A960-EF0A6BD5505F}"/>
+                <a16:creationId xmlns:a16="http://schemas.microsoft.com/office/drawing/2014/main" id="{2E18AC3F-7E2D-4349-915D-9E136F479C22}"/>
               </a:ext>
             </a:extLst>
           </p:cNvPr>
@@ -5797,7 +5820,7 @@
           <p:cNvPr id="36" name="">
             <a:extLst xmlns:a="http://schemas.openxmlformats.org/drawingml/2006/main">
               <a:ext uri="{FF2B5EF4-FFF2-40B4-BE49-F238E27FC236}">
-                <a16:creationId xmlns:a16="http://schemas.microsoft.com/office/drawing/2014/main" id="{EC382CD0-B01D-49DF-A78A-BC9B50EFE443}"/>
+                <a16:creationId xmlns:a16="http://schemas.microsoft.com/office/drawing/2014/main" id="{C8F33AF3-7015-4877-BC1F-8AB8F5539A39}"/>
               </a:ext>
             </a:extLst>
           </p:cNvPr>
@@ -5861,7 +5884,7 @@
           <p:cNvPr id="37" name="">
             <a:extLst xmlns:a="http://schemas.openxmlformats.org/drawingml/2006/main">
               <a:ext uri="{FF2B5EF4-FFF2-40B4-BE49-F238E27FC236}">
-                <a16:creationId xmlns:a16="http://schemas.microsoft.com/office/drawing/2014/main" id="{695A1CC7-8F39-4C3B-9D58-847636C7628F}"/>
+                <a16:creationId xmlns:a16="http://schemas.microsoft.com/office/drawing/2014/main" id="{FED70F21-069E-4D66-9AD6-A6B170EDB34B}"/>
               </a:ext>
             </a:extLst>
           </p:cNvPr>
@@ -5894,7 +5917,7 @@
           <p:cNvPr id="38" name="">
             <a:extLst xmlns:a="http://schemas.openxmlformats.org/drawingml/2006/main">
               <a:ext uri="{FF2B5EF4-FFF2-40B4-BE49-F238E27FC236}">
-                <a16:creationId xmlns:a16="http://schemas.microsoft.com/office/drawing/2014/main" id="{E0C88AEB-738B-4C1F-BCB4-0713E243BC22}"/>
+                <a16:creationId xmlns:a16="http://schemas.microsoft.com/office/drawing/2014/main" id="{616A3A9D-9852-4BE8-A55D-173909C77124}"/>
               </a:ext>
             </a:extLst>
           </p:cNvPr>
@@ -5958,7 +5981,7 @@
           <p:cNvPr id="39" name="">
             <a:extLst xmlns:a="http://schemas.openxmlformats.org/drawingml/2006/main">
               <a:ext uri="{FF2B5EF4-FFF2-40B4-BE49-F238E27FC236}">
-                <a16:creationId xmlns:a16="http://schemas.microsoft.com/office/drawing/2014/main" id="{8D2B1EF0-A13C-4844-AF2F-F8D3AFB95377}"/>
+                <a16:creationId xmlns:a16="http://schemas.microsoft.com/office/drawing/2014/main" id="{B91BB2F8-90E3-4C75-B4B7-E78F1FF1E287}"/>
               </a:ext>
             </a:extLst>
           </p:cNvPr>
@@ -5991,7 +6014,7 @@
           <p:cNvPr id="40" name="">
             <a:extLst xmlns:a="http://schemas.openxmlformats.org/drawingml/2006/main">
               <a:ext uri="{FF2B5EF4-FFF2-40B4-BE49-F238E27FC236}">
-                <a16:creationId xmlns:a16="http://schemas.microsoft.com/office/drawing/2014/main" id="{34CECD73-ADD3-4AA0-AC94-78ED7595C8C2}"/>
+                <a16:creationId xmlns:a16="http://schemas.microsoft.com/office/drawing/2014/main" id="{2AD9D77C-51B7-445B-A0C8-60F206E9C923}"/>
               </a:ext>
             </a:extLst>
           </p:cNvPr>
@@ -6053,7 +6076,7 @@
     </p:spTree>
     <p:extLst>
       <p:ext uri="{BB962C8B-B14F-4D97-AF65-F5344CB8AC3E}">
-        <p14:creationId xmlns:p14="http://schemas.microsoft.com/office/powerpoint/2010/main" val="505656731"/>
+        <p14:creationId xmlns:p14="http://schemas.microsoft.com/office/powerpoint/2010/main" val="225012175"/>
       </p:ext>
     </p:extLst>
   </p:cSld>
@@ -6077,7 +6100,7 @@
           <p:cNvPr id="1" name="">
             <a:extLst xmlns:a="http://schemas.openxmlformats.org/drawingml/2006/main">
               <a:ext uri="{FF2B5EF4-FFF2-40B4-BE49-F238E27FC236}">
-                <a16:creationId xmlns:a16="http://schemas.microsoft.com/office/drawing/2014/main" id="{55118002-F66F-4949-A03D-7D66D6718E49}"/>
+                <a16:creationId xmlns:a16="http://schemas.microsoft.com/office/drawing/2014/main" id="{9F097177-0BBC-4535-A67C-709D4EAC1EB4}"/>
               </a:ext>
             </a:extLst>
           </p:cNvPr>
@@ -6112,7 +6135,7 @@
           <p:cNvPr id="2" name="">
             <a:extLst xmlns:a="http://schemas.openxmlformats.org/drawingml/2006/main">
               <a:ext uri="{FF2B5EF4-FFF2-40B4-BE49-F238E27FC236}">
-                <a16:creationId xmlns:a16="http://schemas.microsoft.com/office/drawing/2014/main" id="{24FEC130-C5CD-4E68-A7A0-5642211CA9BA}"/>
+                <a16:creationId xmlns:a16="http://schemas.microsoft.com/office/drawing/2014/main" id="{C328DC27-7BCB-4D65-A8F2-BBDA75E4179B}"/>
               </a:ext>
             </a:extLst>
           </p:cNvPr>
@@ -6176,7 +6199,7 @@
           <p:cNvPr id="3" name="">
             <a:extLst xmlns:a="http://schemas.openxmlformats.org/drawingml/2006/main">
               <a:ext uri="{FF2B5EF4-FFF2-40B4-BE49-F238E27FC236}">
-                <a16:creationId xmlns:a16="http://schemas.microsoft.com/office/drawing/2014/main" id="{7315F9BD-8F9D-4B5D-93A8-02D4CB2B8258}"/>
+                <a16:creationId xmlns:a16="http://schemas.microsoft.com/office/drawing/2014/main" id="{AD5D4641-C860-4E30-B8C2-4C2FBA83D50F}"/>
               </a:ext>
             </a:extLst>
           </p:cNvPr>
@@ -6240,7 +6263,7 @@
           <p:cNvPr id="4" name="">
             <a:extLst xmlns:a="http://schemas.openxmlformats.org/drawingml/2006/main">
               <a:ext uri="{FF2B5EF4-FFF2-40B4-BE49-F238E27FC236}">
-                <a16:creationId xmlns:a16="http://schemas.microsoft.com/office/drawing/2014/main" id="{5C429010-E3B8-4AC2-8E25-D2DB67737016}"/>
+                <a16:creationId xmlns:a16="http://schemas.microsoft.com/office/drawing/2014/main" id="{646B0CF1-FE29-464A-9B5A-908F7A1D9D1A}"/>
               </a:ext>
             </a:extLst>
           </p:cNvPr>
@@ -6304,7 +6327,7 @@
           <p:cNvPr id="5" name="">
             <a:extLst xmlns:a="http://schemas.openxmlformats.org/drawingml/2006/main">
               <a:ext uri="{FF2B5EF4-FFF2-40B4-BE49-F238E27FC236}">
-                <a16:creationId xmlns:a16="http://schemas.microsoft.com/office/drawing/2014/main" id="{20782A84-C015-4D74-B20D-F4DFC9A07136}"/>
+                <a16:creationId xmlns:a16="http://schemas.microsoft.com/office/drawing/2014/main" id="{3C57F93F-9752-4C0B-8C8B-7B658515EB82}"/>
               </a:ext>
             </a:extLst>
           </p:cNvPr>
@@ -6337,7 +6360,7 @@
           <p:cNvPr id="6" name="">
             <a:extLst xmlns:a="http://schemas.openxmlformats.org/drawingml/2006/main">
               <a:ext uri="{FF2B5EF4-FFF2-40B4-BE49-F238E27FC236}">
-                <a16:creationId xmlns:a16="http://schemas.microsoft.com/office/drawing/2014/main" id="{45A0227F-EAAC-4976-A705-318D451C1ED3}"/>
+                <a16:creationId xmlns:a16="http://schemas.microsoft.com/office/drawing/2014/main" id="{053A314B-0DE6-4FF0-8EF7-4FA49EE687A6}"/>
               </a:ext>
             </a:extLst>
           </p:cNvPr>
@@ -6370,7 +6393,7 @@
           <p:cNvPr id="7" name="">
             <a:extLst xmlns:a="http://schemas.openxmlformats.org/drawingml/2006/main">
               <a:ext uri="{FF2B5EF4-FFF2-40B4-BE49-F238E27FC236}">
-                <a16:creationId xmlns:a16="http://schemas.microsoft.com/office/drawing/2014/main" id="{0FD7A9AD-DDCF-4E4C-9919-1F81E9F1E39D}"/>
+                <a16:creationId xmlns:a16="http://schemas.microsoft.com/office/drawing/2014/main" id="{4F96DB6B-2F1A-4CEA-8B0E-C524346EF884}"/>
               </a:ext>
             </a:extLst>
           </p:cNvPr>
@@ -6434,7 +6457,7 @@
           <p:cNvPr id="8" name="">
             <a:extLst xmlns:a="http://schemas.openxmlformats.org/drawingml/2006/main">
               <a:ext uri="{FF2B5EF4-FFF2-40B4-BE49-F238E27FC236}">
-                <a16:creationId xmlns:a16="http://schemas.microsoft.com/office/drawing/2014/main" id="{8DA90215-FF79-4120-B452-877AA63B9815}"/>
+                <a16:creationId xmlns:a16="http://schemas.microsoft.com/office/drawing/2014/main" id="{B5EDD5EA-DE57-4FAB-BFC9-A59C42E736BC}"/>
               </a:ext>
             </a:extLst>
           </p:cNvPr>
@@ -6498,7 +6521,7 @@
           <p:cNvPr id="9" name="">
             <a:extLst xmlns:a="http://schemas.openxmlformats.org/drawingml/2006/main">
               <a:ext uri="{FF2B5EF4-FFF2-40B4-BE49-F238E27FC236}">
-                <a16:creationId xmlns:a16="http://schemas.microsoft.com/office/drawing/2014/main" id="{E268A24C-A470-4D65-9672-55959E1A7427}"/>
+                <a16:creationId xmlns:a16="http://schemas.microsoft.com/office/drawing/2014/main" id="{F4530DED-32ED-49EC-9599-3AC793EB5368}"/>
               </a:ext>
             </a:extLst>
           </p:cNvPr>
@@ -6562,7 +6585,7 @@
           <p:cNvPr id="10" name="">
             <a:extLst xmlns:a="http://schemas.openxmlformats.org/drawingml/2006/main">
               <a:ext uri="{FF2B5EF4-FFF2-40B4-BE49-F238E27FC236}">
-                <a16:creationId xmlns:a16="http://schemas.microsoft.com/office/drawing/2014/main" id="{2C26BBF1-CA7B-4D2D-A24A-88E590BF0640}"/>
+                <a16:creationId xmlns:a16="http://schemas.microsoft.com/office/drawing/2014/main" id="{B64AC100-1412-4E5C-9E4A-708A12DC6B54}"/>
               </a:ext>
             </a:extLst>
           </p:cNvPr>
@@ -6595,7 +6618,7 @@
           <p:cNvPr id="11" name="">
             <a:extLst xmlns:a="http://schemas.openxmlformats.org/drawingml/2006/main">
               <a:ext uri="{FF2B5EF4-FFF2-40B4-BE49-F238E27FC236}">
-                <a16:creationId xmlns:a16="http://schemas.microsoft.com/office/drawing/2014/main" id="{8E79E567-AAEF-4E55-99D2-B2A57EAB8840}"/>
+                <a16:creationId xmlns:a16="http://schemas.microsoft.com/office/drawing/2014/main" id="{BC76B66B-0815-461E-98BE-64B4CDC43CAC}"/>
               </a:ext>
             </a:extLst>
           </p:cNvPr>
@@ -6659,7 +6682,7 @@
           <p:cNvPr id="12" name="">
             <a:extLst xmlns:a="http://schemas.openxmlformats.org/drawingml/2006/main">
               <a:ext uri="{FF2B5EF4-FFF2-40B4-BE49-F238E27FC236}">
-                <a16:creationId xmlns:a16="http://schemas.microsoft.com/office/drawing/2014/main" id="{87C2C194-BEAF-4338-A233-ED1E13850EFC}"/>
+                <a16:creationId xmlns:a16="http://schemas.microsoft.com/office/drawing/2014/main" id="{90E5A5AA-947B-4E0A-AF2F-C3E2213FCA83}"/>
               </a:ext>
             </a:extLst>
           </p:cNvPr>
@@ -6723,7 +6746,7 @@
           <p:cNvPr id="13" name="">
             <a:extLst xmlns:a="http://schemas.openxmlformats.org/drawingml/2006/main">
               <a:ext uri="{FF2B5EF4-FFF2-40B4-BE49-F238E27FC236}">
-                <a16:creationId xmlns:a16="http://schemas.microsoft.com/office/drawing/2014/main" id="{94AEFE2A-FBFB-4EA0-B443-BED9085D45D3}"/>
+                <a16:creationId xmlns:a16="http://schemas.microsoft.com/office/drawing/2014/main" id="{7D049470-AD3D-4288-AAE9-BA0E89EB7D53}"/>
               </a:ext>
             </a:extLst>
           </p:cNvPr>
@@ -6787,7 +6810,7 @@
           <p:cNvPr id="14" name="">
             <a:extLst xmlns:a="http://schemas.openxmlformats.org/drawingml/2006/main">
               <a:ext uri="{FF2B5EF4-FFF2-40B4-BE49-F238E27FC236}">
-                <a16:creationId xmlns:a16="http://schemas.microsoft.com/office/drawing/2014/main" id="{2EF80241-D42F-4090-8D4C-FF98EE8DF624}"/>
+                <a16:creationId xmlns:a16="http://schemas.microsoft.com/office/drawing/2014/main" id="{1CFCD987-0EE4-4BAA-9B3C-FDF69CDE5070}"/>
               </a:ext>
             </a:extLst>
           </p:cNvPr>
@@ -6820,7 +6843,7 @@
           <p:cNvPr id="15" name="">
             <a:extLst xmlns:a="http://schemas.openxmlformats.org/drawingml/2006/main">
               <a:ext uri="{FF2B5EF4-FFF2-40B4-BE49-F238E27FC236}">
-                <a16:creationId xmlns:a16="http://schemas.microsoft.com/office/drawing/2014/main" id="{5FE6E4DA-3873-4B25-AA28-2612091CFE06}"/>
+                <a16:creationId xmlns:a16="http://schemas.microsoft.com/office/drawing/2014/main" id="{82167D5A-A37D-4409-8DED-A6371FB9D997}"/>
               </a:ext>
             </a:extLst>
           </p:cNvPr>
@@ -6884,7 +6907,7 @@
           <p:cNvPr id="16" name="">
             <a:extLst xmlns:a="http://schemas.openxmlformats.org/drawingml/2006/main">
               <a:ext uri="{FF2B5EF4-FFF2-40B4-BE49-F238E27FC236}">
-                <a16:creationId xmlns:a16="http://schemas.microsoft.com/office/drawing/2014/main" id="{C58FC682-9E51-4832-992F-D42A0878FB79}"/>
+                <a16:creationId xmlns:a16="http://schemas.microsoft.com/office/drawing/2014/main" id="{9A456974-2EAB-4EB9-855F-056C8977D9A2}"/>
               </a:ext>
             </a:extLst>
           </p:cNvPr>
@@ -6948,7 +6971,7 @@
           <p:cNvPr id="17" name="">
             <a:extLst xmlns:a="http://schemas.openxmlformats.org/drawingml/2006/main">
               <a:ext uri="{FF2B5EF4-FFF2-40B4-BE49-F238E27FC236}">
-                <a16:creationId xmlns:a16="http://schemas.microsoft.com/office/drawing/2014/main" id="{E8A523FC-3578-47CD-860A-DE23CDFDC63C}"/>
+                <a16:creationId xmlns:a16="http://schemas.microsoft.com/office/drawing/2014/main" id="{BD97DFED-C347-4B47-852B-56444027DABD}"/>
               </a:ext>
             </a:extLst>
           </p:cNvPr>
@@ -7012,7 +7035,7 @@
           <p:cNvPr id="18" name="">
             <a:extLst xmlns:a="http://schemas.openxmlformats.org/drawingml/2006/main">
               <a:ext uri="{FF2B5EF4-FFF2-40B4-BE49-F238E27FC236}">
-                <a16:creationId xmlns:a16="http://schemas.microsoft.com/office/drawing/2014/main" id="{5BCA18BD-F956-4F45-90D8-E2CCA09334DC}"/>
+                <a16:creationId xmlns:a16="http://schemas.microsoft.com/office/drawing/2014/main" id="{3B09EC22-A61E-4B0F-B326-A31FA71A7138}"/>
               </a:ext>
             </a:extLst>
           </p:cNvPr>
@@ -7045,7 +7068,7 @@
           <p:cNvPr id="19" name="">
             <a:extLst xmlns:a="http://schemas.openxmlformats.org/drawingml/2006/main">
               <a:ext uri="{FF2B5EF4-FFF2-40B4-BE49-F238E27FC236}">
-                <a16:creationId xmlns:a16="http://schemas.microsoft.com/office/drawing/2014/main" id="{1FEE0EF2-C541-4600-83E8-4DB9153FBB4F}"/>
+                <a16:creationId xmlns:a16="http://schemas.microsoft.com/office/drawing/2014/main" id="{965DD943-281F-41A1-8C49-5D6B1637271D}"/>
               </a:ext>
             </a:extLst>
           </p:cNvPr>
@@ -7109,7 +7132,7 @@
           <p:cNvPr id="20" name="">
             <a:extLst xmlns:a="http://schemas.openxmlformats.org/drawingml/2006/main">
               <a:ext uri="{FF2B5EF4-FFF2-40B4-BE49-F238E27FC236}">
-                <a16:creationId xmlns:a16="http://schemas.microsoft.com/office/drawing/2014/main" id="{42A42312-AF56-4513-9132-5D49A1D36D9D}"/>
+                <a16:creationId xmlns:a16="http://schemas.microsoft.com/office/drawing/2014/main" id="{1BF7E2AF-22C5-42B5-8134-F3EAE6BA7C22}"/>
               </a:ext>
             </a:extLst>
           </p:cNvPr>
@@ -7173,7 +7196,7 @@
           <p:cNvPr id="21" name="">
             <a:extLst xmlns:a="http://schemas.openxmlformats.org/drawingml/2006/main">
               <a:ext uri="{FF2B5EF4-FFF2-40B4-BE49-F238E27FC236}">
-                <a16:creationId xmlns:a16="http://schemas.microsoft.com/office/drawing/2014/main" id="{92EEE0A7-59F5-4EEC-AFF1-A9C0FDB01D0E}"/>
+                <a16:creationId xmlns:a16="http://schemas.microsoft.com/office/drawing/2014/main" id="{2FBD2220-8D37-4ACB-8A2A-53E131797AB3}"/>
               </a:ext>
             </a:extLst>
           </p:cNvPr>
@@ -7237,7 +7260,7 @@
           <p:cNvPr id="22" name="">
             <a:extLst xmlns:a="http://schemas.openxmlformats.org/drawingml/2006/main">
               <a:ext uri="{FF2B5EF4-FFF2-40B4-BE49-F238E27FC236}">
-                <a16:creationId xmlns:a16="http://schemas.microsoft.com/office/drawing/2014/main" id="{A9BF9391-9092-4BDB-B29D-899B5A87F2A1}"/>
+                <a16:creationId xmlns:a16="http://schemas.microsoft.com/office/drawing/2014/main" id="{243160BA-EBB5-4E65-94CD-8997B49A6879}"/>
               </a:ext>
             </a:extLst>
           </p:cNvPr>
@@ -7270,7 +7293,7 @@
           <p:cNvPr id="23" name="">
             <a:extLst xmlns:a="http://schemas.openxmlformats.org/drawingml/2006/main">
               <a:ext uri="{FF2B5EF4-FFF2-40B4-BE49-F238E27FC236}">
-                <a16:creationId xmlns:a16="http://schemas.microsoft.com/office/drawing/2014/main" id="{4BB8BAF9-1A05-49C1-A13A-061F3A6AE263}"/>
+                <a16:creationId xmlns:a16="http://schemas.microsoft.com/office/drawing/2014/main" id="{D2C0ABA7-338C-4BCC-8E9D-FBF1D124A089}"/>
               </a:ext>
             </a:extLst>
           </p:cNvPr>
@@ -7334,7 +7357,7 @@
           <p:cNvPr id="24" name="">
             <a:extLst xmlns:a="http://schemas.openxmlformats.org/drawingml/2006/main">
               <a:ext uri="{FF2B5EF4-FFF2-40B4-BE49-F238E27FC236}">
-                <a16:creationId xmlns:a16="http://schemas.microsoft.com/office/drawing/2014/main" id="{0C8B94F3-C05C-4A4D-A1D8-6DDAC14769EE}"/>
+                <a16:creationId xmlns:a16="http://schemas.microsoft.com/office/drawing/2014/main" id="{3496B7CD-708E-485C-B3C8-497D583D5F80}"/>
               </a:ext>
             </a:extLst>
           </p:cNvPr>
@@ -7398,7 +7421,7 @@
           <p:cNvPr id="25" name="">
             <a:extLst xmlns:a="http://schemas.openxmlformats.org/drawingml/2006/main">
               <a:ext uri="{FF2B5EF4-FFF2-40B4-BE49-F238E27FC236}">
-                <a16:creationId xmlns:a16="http://schemas.microsoft.com/office/drawing/2014/main" id="{4C0D86B6-4F7C-46E5-98EC-B074F47A5049}"/>
+                <a16:creationId xmlns:a16="http://schemas.microsoft.com/office/drawing/2014/main" id="{9E5C81AC-E259-4756-BE9F-1B5CDA03EFCF}"/>
               </a:ext>
             </a:extLst>
           </p:cNvPr>
@@ -7462,7 +7485,7 @@
           <p:cNvPr id="26" name="">
             <a:extLst xmlns:a="http://schemas.openxmlformats.org/drawingml/2006/main">
               <a:ext uri="{FF2B5EF4-FFF2-40B4-BE49-F238E27FC236}">
-                <a16:creationId xmlns:a16="http://schemas.microsoft.com/office/drawing/2014/main" id="{D192CE8F-A0CC-452C-A626-5A69F444F2AA}"/>
+                <a16:creationId xmlns:a16="http://schemas.microsoft.com/office/drawing/2014/main" id="{C6229672-C532-4951-9002-EFA32C49A74E}"/>
               </a:ext>
             </a:extLst>
           </p:cNvPr>
@@ -7495,7 +7518,7 @@
           <p:cNvPr id="27" name="">
             <a:extLst xmlns:a="http://schemas.openxmlformats.org/drawingml/2006/main">
               <a:ext uri="{FF2B5EF4-FFF2-40B4-BE49-F238E27FC236}">
-                <a16:creationId xmlns:a16="http://schemas.microsoft.com/office/drawing/2014/main" id="{4F056D7F-C700-4454-8601-79288C3DB39C}"/>
+                <a16:creationId xmlns:a16="http://schemas.microsoft.com/office/drawing/2014/main" id="{D3DA9314-6958-4480-BBDC-3EB11FA8C1CB}"/>
               </a:ext>
             </a:extLst>
           </p:cNvPr>
@@ -7559,7 +7582,7 @@
           <p:cNvPr id="28" name="">
             <a:extLst xmlns:a="http://schemas.openxmlformats.org/drawingml/2006/main">
               <a:ext uri="{FF2B5EF4-FFF2-40B4-BE49-F238E27FC236}">
-                <a16:creationId xmlns:a16="http://schemas.microsoft.com/office/drawing/2014/main" id="{D4408598-3D81-48B1-BF04-56250123AD30}"/>
+                <a16:creationId xmlns:a16="http://schemas.microsoft.com/office/drawing/2014/main" id="{719EF1F7-9E67-4A3A-8967-C6E57FEF2700}"/>
               </a:ext>
             </a:extLst>
           </p:cNvPr>
@@ -7623,7 +7646,7 @@
           <p:cNvPr id="29" name="">
             <a:extLst xmlns:a="http://schemas.openxmlformats.org/drawingml/2006/main">
               <a:ext uri="{FF2B5EF4-FFF2-40B4-BE49-F238E27FC236}">
-                <a16:creationId xmlns:a16="http://schemas.microsoft.com/office/drawing/2014/main" id="{682D6C17-ECD4-4F4E-AEB7-0D64EF88DA4D}"/>
+                <a16:creationId xmlns:a16="http://schemas.microsoft.com/office/drawing/2014/main" id="{B6168031-5360-4AB5-842E-EB2F54B166F5}"/>
               </a:ext>
             </a:extLst>
           </p:cNvPr>
@@ -7687,7 +7710,7 @@
           <p:cNvPr id="30" name="">
             <a:extLst xmlns:a="http://schemas.openxmlformats.org/drawingml/2006/main">
               <a:ext uri="{FF2B5EF4-FFF2-40B4-BE49-F238E27FC236}">
-                <a16:creationId xmlns:a16="http://schemas.microsoft.com/office/drawing/2014/main" id="{6757D294-580F-48F5-A777-E46F686CFFFB}"/>
+                <a16:creationId xmlns:a16="http://schemas.microsoft.com/office/drawing/2014/main" id="{C02E27D3-B66D-4C6C-A0E0-E036CF04A677}"/>
               </a:ext>
             </a:extLst>
           </p:cNvPr>
@@ -7720,7 +7743,7 @@
           <p:cNvPr id="31" name="">
             <a:extLst xmlns:a="http://schemas.openxmlformats.org/drawingml/2006/main">
               <a:ext uri="{FF2B5EF4-FFF2-40B4-BE49-F238E27FC236}">
-                <a16:creationId xmlns:a16="http://schemas.microsoft.com/office/drawing/2014/main" id="{1D0576D3-ADAB-491C-987D-C6316D11C9BC}"/>
+                <a16:creationId xmlns:a16="http://schemas.microsoft.com/office/drawing/2014/main" id="{78ECD533-E55C-47C8-BD1A-A7B4851F1D6B}"/>
               </a:ext>
             </a:extLst>
           </p:cNvPr>
@@ -7784,7 +7807,7 @@
           <p:cNvPr id="32" name="">
             <a:extLst xmlns:a="http://schemas.openxmlformats.org/drawingml/2006/main">
               <a:ext uri="{FF2B5EF4-FFF2-40B4-BE49-F238E27FC236}">
-                <a16:creationId xmlns:a16="http://schemas.microsoft.com/office/drawing/2014/main" id="{E76B7B35-4013-4F1B-90AA-0AB4FFF7AA6A}"/>
+                <a16:creationId xmlns:a16="http://schemas.microsoft.com/office/drawing/2014/main" id="{80684FD9-F256-41A5-B618-1353A6CED7D2}"/>
               </a:ext>
             </a:extLst>
           </p:cNvPr>
@@ -7848,7 +7871,7 @@
           <p:cNvPr id="33" name="">
             <a:extLst xmlns:a="http://schemas.openxmlformats.org/drawingml/2006/main">
               <a:ext uri="{FF2B5EF4-FFF2-40B4-BE49-F238E27FC236}">
-                <a16:creationId xmlns:a16="http://schemas.microsoft.com/office/drawing/2014/main" id="{5ABF2196-C104-4282-B831-C57DEDED0BF1}"/>
+                <a16:creationId xmlns:a16="http://schemas.microsoft.com/office/drawing/2014/main" id="{BD14DDD4-C2A9-46CF-8A55-0E4CBE423C60}"/>
               </a:ext>
             </a:extLst>
           </p:cNvPr>
@@ -7912,7 +7935,7 @@
           <p:cNvPr id="34" name="">
             <a:extLst xmlns:a="http://schemas.openxmlformats.org/drawingml/2006/main">
               <a:ext uri="{FF2B5EF4-FFF2-40B4-BE49-F238E27FC236}">
-                <a16:creationId xmlns:a16="http://schemas.microsoft.com/office/drawing/2014/main" id="{96B9C7E7-2553-4555-809C-2B796F6C40ED}"/>
+                <a16:creationId xmlns:a16="http://schemas.microsoft.com/office/drawing/2014/main" id="{CE6DB0A1-4604-4DE2-821F-40BDA82EA1F9}"/>
               </a:ext>
             </a:extLst>
           </p:cNvPr>
@@ -7945,7 +7968,7 @@
           <p:cNvPr id="35" name="">
             <a:extLst xmlns:a="http://schemas.openxmlformats.org/drawingml/2006/main">
               <a:ext uri="{FF2B5EF4-FFF2-40B4-BE49-F238E27FC236}">
-                <a16:creationId xmlns:a16="http://schemas.microsoft.com/office/drawing/2014/main" id="{4E87BDA6-1CFC-4C65-9593-6AA3148ED184}"/>
+                <a16:creationId xmlns:a16="http://schemas.microsoft.com/office/drawing/2014/main" id="{13FE49C9-835A-4BCE-AE36-D7F0919341B8}"/>
               </a:ext>
             </a:extLst>
           </p:cNvPr>
@@ -8009,7 +8032,7 @@
           <p:cNvPr id="36" name="">
             <a:extLst xmlns:a="http://schemas.openxmlformats.org/drawingml/2006/main">
               <a:ext uri="{FF2B5EF4-FFF2-40B4-BE49-F238E27FC236}">
-                <a16:creationId xmlns:a16="http://schemas.microsoft.com/office/drawing/2014/main" id="{3BD96C53-66E3-444C-AD0D-B4C55C217E1D}"/>
+                <a16:creationId xmlns:a16="http://schemas.microsoft.com/office/drawing/2014/main" id="{F88606CA-EEA5-4AB1-BCA0-F1B29459DE8A}"/>
               </a:ext>
             </a:extLst>
           </p:cNvPr>
@@ -8073,7 +8096,7 @@
           <p:cNvPr id="37" name="">
             <a:extLst xmlns:a="http://schemas.openxmlformats.org/drawingml/2006/main">
               <a:ext uri="{FF2B5EF4-FFF2-40B4-BE49-F238E27FC236}">
-                <a16:creationId xmlns:a16="http://schemas.microsoft.com/office/drawing/2014/main" id="{ECD82F4A-146A-43AD-85F8-34C42916A913}"/>
+                <a16:creationId xmlns:a16="http://schemas.microsoft.com/office/drawing/2014/main" id="{4C57FD66-8056-4552-A093-7FEF11FC3656}"/>
               </a:ext>
             </a:extLst>
           </p:cNvPr>
@@ -8137,7 +8160,7 @@
           <p:cNvPr id="38" name="">
             <a:extLst xmlns:a="http://schemas.openxmlformats.org/drawingml/2006/main">
               <a:ext uri="{FF2B5EF4-FFF2-40B4-BE49-F238E27FC236}">
-                <a16:creationId xmlns:a16="http://schemas.microsoft.com/office/drawing/2014/main" id="{3151BA3F-F2FF-403D-9060-A9BF47A449BA}"/>
+                <a16:creationId xmlns:a16="http://schemas.microsoft.com/office/drawing/2014/main" id="{97B37D39-F39D-4CBF-B207-F6C7E4C5D8B6}"/>
               </a:ext>
             </a:extLst>
           </p:cNvPr>
@@ -8170,7 +8193,7 @@
           <p:cNvPr id="39" name="">
             <a:extLst xmlns:a="http://schemas.openxmlformats.org/drawingml/2006/main">
               <a:ext uri="{FF2B5EF4-FFF2-40B4-BE49-F238E27FC236}">
-                <a16:creationId xmlns:a16="http://schemas.microsoft.com/office/drawing/2014/main" id="{AB08770E-00D9-4E9B-AF6D-C307401F12B9}"/>
+                <a16:creationId xmlns:a16="http://schemas.microsoft.com/office/drawing/2014/main" id="{37B5E84D-BD46-4587-B674-91503347A1BA}"/>
               </a:ext>
             </a:extLst>
           </p:cNvPr>
@@ -8234,7 +8257,7 @@
           <p:cNvPr id="40" name="">
             <a:extLst xmlns:a="http://schemas.openxmlformats.org/drawingml/2006/main">
               <a:ext uri="{FF2B5EF4-FFF2-40B4-BE49-F238E27FC236}">
-                <a16:creationId xmlns:a16="http://schemas.microsoft.com/office/drawing/2014/main" id="{71CCD184-F7EF-4C37-A92F-5FE8C0E270E2}"/>
+                <a16:creationId xmlns:a16="http://schemas.microsoft.com/office/drawing/2014/main" id="{2F61FDD2-CA0F-4A33-AC9C-6F70D6B45226}"/>
               </a:ext>
             </a:extLst>
           </p:cNvPr>
@@ -8298,7 +8321,7 @@
           <p:cNvPr id="41" name="">
             <a:extLst xmlns:a="http://schemas.openxmlformats.org/drawingml/2006/main">
               <a:ext uri="{FF2B5EF4-FFF2-40B4-BE49-F238E27FC236}">
-                <a16:creationId xmlns:a16="http://schemas.microsoft.com/office/drawing/2014/main" id="{539AEDC4-EA94-4E6D-A764-5DA4D1CF7FC1}"/>
+                <a16:creationId xmlns:a16="http://schemas.microsoft.com/office/drawing/2014/main" id="{3A200BC6-9BA8-41D1-B366-C5DC51388B7D}"/>
               </a:ext>
             </a:extLst>
           </p:cNvPr>
@@ -8362,7 +8385,7 @@
           <p:cNvPr id="42" name="">
             <a:extLst xmlns:a="http://schemas.openxmlformats.org/drawingml/2006/main">
               <a:ext uri="{FF2B5EF4-FFF2-40B4-BE49-F238E27FC236}">
-                <a16:creationId xmlns:a16="http://schemas.microsoft.com/office/drawing/2014/main" id="{03D095D1-D7EC-4E2D-BE1F-CB05073E4A25}"/>
+                <a16:creationId xmlns:a16="http://schemas.microsoft.com/office/drawing/2014/main" id="{130425EC-A763-473A-87E2-88F019B8432E}"/>
               </a:ext>
             </a:extLst>
           </p:cNvPr>
@@ -8395,7 +8418,7 @@
           <p:cNvPr id="43" name="">
             <a:extLst xmlns:a="http://schemas.openxmlformats.org/drawingml/2006/main">
               <a:ext uri="{FF2B5EF4-FFF2-40B4-BE49-F238E27FC236}">
-                <a16:creationId xmlns:a16="http://schemas.microsoft.com/office/drawing/2014/main" id="{FBB17776-92FA-4151-AC75-65DAA4DD8149}"/>
+                <a16:creationId xmlns:a16="http://schemas.microsoft.com/office/drawing/2014/main" id="{5C56A0AA-A034-4022-8C2C-7AE98616750A}"/>
               </a:ext>
             </a:extLst>
           </p:cNvPr>
@@ -8459,7 +8482,7 @@
           <p:cNvPr id="44" name="">
             <a:extLst xmlns:a="http://schemas.openxmlformats.org/drawingml/2006/main">
               <a:ext uri="{FF2B5EF4-FFF2-40B4-BE49-F238E27FC236}">
-                <a16:creationId xmlns:a16="http://schemas.microsoft.com/office/drawing/2014/main" id="{3B73DDC1-C486-48CF-890E-2556D6746083}"/>
+                <a16:creationId xmlns:a16="http://schemas.microsoft.com/office/drawing/2014/main" id="{BC84F709-44B8-49EE-8680-4C32301997C4}"/>
               </a:ext>
             </a:extLst>
           </p:cNvPr>
@@ -8523,7 +8546,7 @@
           <p:cNvPr id="45" name="">
             <a:extLst xmlns:a="http://schemas.openxmlformats.org/drawingml/2006/main">
               <a:ext uri="{FF2B5EF4-FFF2-40B4-BE49-F238E27FC236}">
-                <a16:creationId xmlns:a16="http://schemas.microsoft.com/office/drawing/2014/main" id="{538B96A0-F2E7-44AF-AAF3-A87668D141FB}"/>
+                <a16:creationId xmlns:a16="http://schemas.microsoft.com/office/drawing/2014/main" id="{789F7316-750B-4B85-A82F-1DF04DBF5145}"/>
               </a:ext>
             </a:extLst>
           </p:cNvPr>
@@ -8587,7 +8610,7 @@
           <p:cNvPr id="46" name="">
             <a:extLst xmlns:a="http://schemas.openxmlformats.org/drawingml/2006/main">
               <a:ext uri="{FF2B5EF4-FFF2-40B4-BE49-F238E27FC236}">
-                <a16:creationId xmlns:a16="http://schemas.microsoft.com/office/drawing/2014/main" id="{5368BE97-2094-4453-B5D2-8EF27A0C5610}"/>
+                <a16:creationId xmlns:a16="http://schemas.microsoft.com/office/drawing/2014/main" id="{B95B69D2-095A-4AD8-8775-3596589AF87B}"/>
               </a:ext>
             </a:extLst>
           </p:cNvPr>
@@ -8620,7 +8643,7 @@
           <p:cNvPr id="47" name="">
             <a:extLst xmlns:a="http://schemas.openxmlformats.org/drawingml/2006/main">
               <a:ext uri="{FF2B5EF4-FFF2-40B4-BE49-F238E27FC236}">
-                <a16:creationId xmlns:a16="http://schemas.microsoft.com/office/drawing/2014/main" id="{A8886EDB-25B7-4953-9491-70F9161EE4BE}"/>
+                <a16:creationId xmlns:a16="http://schemas.microsoft.com/office/drawing/2014/main" id="{0B65C9E4-3027-4022-B77F-4388C9576A30}"/>
               </a:ext>
             </a:extLst>
           </p:cNvPr>
@@ -8684,7 +8707,7 @@
           <p:cNvPr id="48" name="">
             <a:extLst xmlns:a="http://schemas.openxmlformats.org/drawingml/2006/main">
               <a:ext uri="{FF2B5EF4-FFF2-40B4-BE49-F238E27FC236}">
-                <a16:creationId xmlns:a16="http://schemas.microsoft.com/office/drawing/2014/main" id="{55EE25B3-CA70-4091-B49C-EFA8E6E8C4AA}"/>
+                <a16:creationId xmlns:a16="http://schemas.microsoft.com/office/drawing/2014/main" id="{AC0B6FAC-3488-49F8-9A26-4A80E9E84310}"/>
               </a:ext>
             </a:extLst>
           </p:cNvPr>
@@ -8748,7 +8771,7 @@
           <p:cNvPr id="49" name="">
             <a:extLst xmlns:a="http://schemas.openxmlformats.org/drawingml/2006/main">
               <a:ext uri="{FF2B5EF4-FFF2-40B4-BE49-F238E27FC236}">
-                <a16:creationId xmlns:a16="http://schemas.microsoft.com/office/drawing/2014/main" id="{F8A9AA43-FB43-4DE5-B78B-04D99D0184B1}"/>
+                <a16:creationId xmlns:a16="http://schemas.microsoft.com/office/drawing/2014/main" id="{397DAD00-8C2F-442F-AE13-00B63CFBC552}"/>
               </a:ext>
             </a:extLst>
           </p:cNvPr>
@@ -8812,7 +8835,7 @@
           <p:cNvPr id="50" name="">
             <a:extLst xmlns:a="http://schemas.openxmlformats.org/drawingml/2006/main">
               <a:ext uri="{FF2B5EF4-FFF2-40B4-BE49-F238E27FC236}">
-                <a16:creationId xmlns:a16="http://schemas.microsoft.com/office/drawing/2014/main" id="{B0DBC4B5-3F17-42D8-A00D-0E4A23AF9655}"/>
+                <a16:creationId xmlns:a16="http://schemas.microsoft.com/office/drawing/2014/main" id="{368AF3ED-B969-4653-9581-385D60AA502B}"/>
               </a:ext>
             </a:extLst>
           </p:cNvPr>
@@ -8845,7 +8868,7 @@
           <p:cNvPr id="51" name="">
             <a:extLst xmlns:a="http://schemas.openxmlformats.org/drawingml/2006/main">
               <a:ext uri="{FF2B5EF4-FFF2-40B4-BE49-F238E27FC236}">
-                <a16:creationId xmlns:a16="http://schemas.microsoft.com/office/drawing/2014/main" id="{97FAD4C1-85CF-4220-88DA-9BC637D61C14}"/>
+                <a16:creationId xmlns:a16="http://schemas.microsoft.com/office/drawing/2014/main" id="{5BB817B6-7AEC-45BE-BE34-485FA04CAAD2}"/>
               </a:ext>
             </a:extLst>
           </p:cNvPr>
@@ -8909,7 +8932,7 @@
           <p:cNvPr id="52" name="">
             <a:extLst xmlns:a="http://schemas.openxmlformats.org/drawingml/2006/main">
               <a:ext uri="{FF2B5EF4-FFF2-40B4-BE49-F238E27FC236}">
-                <a16:creationId xmlns:a16="http://schemas.microsoft.com/office/drawing/2014/main" id="{CF07082C-1EF0-49AF-85A4-8341A72BD035}"/>
+                <a16:creationId xmlns:a16="http://schemas.microsoft.com/office/drawing/2014/main" id="{9B6ABFE3-6CAF-4CD3-A5B4-B37C8EDCF97F}"/>
               </a:ext>
             </a:extLst>
           </p:cNvPr>
@@ -8973,7 +8996,7 @@
           <p:cNvPr id="53" name="">
             <a:extLst xmlns:a="http://schemas.openxmlformats.org/drawingml/2006/main">
               <a:ext uri="{FF2B5EF4-FFF2-40B4-BE49-F238E27FC236}">
-                <a16:creationId xmlns:a16="http://schemas.microsoft.com/office/drawing/2014/main" id="{3B6D14F5-42FF-4662-91A6-D85B2D69725B}"/>
+                <a16:creationId xmlns:a16="http://schemas.microsoft.com/office/drawing/2014/main" id="{AE6F1CFE-DA46-4D1E-A669-3C577AF71A2B}"/>
               </a:ext>
             </a:extLst>
           </p:cNvPr>
@@ -9037,7 +9060,7 @@
           <p:cNvPr id="54" name="">
             <a:extLst xmlns:a="http://schemas.openxmlformats.org/drawingml/2006/main">
               <a:ext uri="{FF2B5EF4-FFF2-40B4-BE49-F238E27FC236}">
-                <a16:creationId xmlns:a16="http://schemas.microsoft.com/office/drawing/2014/main" id="{D06B2562-5B48-463F-949B-F9452159F489}"/>
+                <a16:creationId xmlns:a16="http://schemas.microsoft.com/office/drawing/2014/main" id="{CAF3A86D-C716-4A56-90F6-9AFE4E1EC970}"/>
               </a:ext>
             </a:extLst>
           </p:cNvPr>
@@ -9070,7 +9093,7 @@
           <p:cNvPr id="55" name="">
             <a:extLst xmlns:a="http://schemas.openxmlformats.org/drawingml/2006/main">
               <a:ext uri="{FF2B5EF4-FFF2-40B4-BE49-F238E27FC236}">
-                <a16:creationId xmlns:a16="http://schemas.microsoft.com/office/drawing/2014/main" id="{E9289684-B140-42EE-A26B-2C62C01C4E3A}"/>
+                <a16:creationId xmlns:a16="http://schemas.microsoft.com/office/drawing/2014/main" id="{FD38D174-5067-4FEB-8A6E-5B6BEEA53B53}"/>
               </a:ext>
             </a:extLst>
           </p:cNvPr>
@@ -9134,7 +9157,7 @@
           <p:cNvPr id="56" name="">
             <a:extLst xmlns:a="http://schemas.openxmlformats.org/drawingml/2006/main">
               <a:ext uri="{FF2B5EF4-FFF2-40B4-BE49-F238E27FC236}">
-                <a16:creationId xmlns:a16="http://schemas.microsoft.com/office/drawing/2014/main" id="{3A8FB894-1B09-482C-85F9-0C052500C08A}"/>
+                <a16:creationId xmlns:a16="http://schemas.microsoft.com/office/drawing/2014/main" id="{27C05B7C-D390-4F96-94D1-B6A5A282954F}"/>
               </a:ext>
             </a:extLst>
           </p:cNvPr>
@@ -9198,7 +9221,7 @@
           <p:cNvPr id="57" name="">
             <a:extLst xmlns:a="http://schemas.openxmlformats.org/drawingml/2006/main">
               <a:ext uri="{FF2B5EF4-FFF2-40B4-BE49-F238E27FC236}">
-                <a16:creationId xmlns:a16="http://schemas.microsoft.com/office/drawing/2014/main" id="{9EE4ADEA-A5D0-42BA-AA18-0A2AB3E36E47}"/>
+                <a16:creationId xmlns:a16="http://schemas.microsoft.com/office/drawing/2014/main" id="{CE059C85-4411-4E98-BE3F-53212D24111B}"/>
               </a:ext>
             </a:extLst>
           </p:cNvPr>
@@ -9262,7 +9285,7 @@
           <p:cNvPr id="58" name="">
             <a:extLst xmlns:a="http://schemas.openxmlformats.org/drawingml/2006/main">
               <a:ext uri="{FF2B5EF4-FFF2-40B4-BE49-F238E27FC236}">
-                <a16:creationId xmlns:a16="http://schemas.microsoft.com/office/drawing/2014/main" id="{33974722-091F-431F-B285-436B6C3C1433}"/>
+                <a16:creationId xmlns:a16="http://schemas.microsoft.com/office/drawing/2014/main" id="{BCC9CFEC-49F8-4DB2-A603-6D4962A86BB5}"/>
               </a:ext>
             </a:extLst>
           </p:cNvPr>
@@ -9295,7 +9318,7 @@
           <p:cNvPr id="59" name="">
             <a:extLst xmlns:a="http://schemas.openxmlformats.org/drawingml/2006/main">
               <a:ext uri="{FF2B5EF4-FFF2-40B4-BE49-F238E27FC236}">
-                <a16:creationId xmlns:a16="http://schemas.microsoft.com/office/drawing/2014/main" id="{CF99E2CA-D5E4-4F6F-8643-D7475040A5D0}"/>
+                <a16:creationId xmlns:a16="http://schemas.microsoft.com/office/drawing/2014/main" id="{6D0CF085-56C0-4459-818B-146C51D3A9D0}"/>
               </a:ext>
             </a:extLst>
           </p:cNvPr>
@@ -9357,7 +9380,7 @@
     </p:spTree>
     <p:extLst>
       <p:ext uri="{BB962C8B-B14F-4D97-AF65-F5344CB8AC3E}">
-        <p14:creationId xmlns:p14="http://schemas.microsoft.com/office/powerpoint/2010/main" val="1140171653"/>
+        <p14:creationId xmlns:p14="http://schemas.microsoft.com/office/powerpoint/2010/main" val="406100971"/>
       </p:ext>
     </p:extLst>
   </p:cSld>
@@ -9381,7 +9404,7 @@
           <p:cNvPr id="1" name="">
             <a:extLst xmlns:a="http://schemas.openxmlformats.org/drawingml/2006/main">
               <a:ext uri="{FF2B5EF4-FFF2-40B4-BE49-F238E27FC236}">
-                <a16:creationId xmlns:a16="http://schemas.microsoft.com/office/drawing/2014/main" id="{61F17C4B-0619-4156-8F3C-ADE517423793}"/>
+                <a16:creationId xmlns:a16="http://schemas.microsoft.com/office/drawing/2014/main" id="{04221373-B9EC-4D93-89D2-3B47EECFA633}"/>
               </a:ext>
             </a:extLst>
           </p:cNvPr>
@@ -9416,7 +9439,7 @@
           <p:cNvPr id="2" name="">
             <a:extLst xmlns:a="http://schemas.openxmlformats.org/drawingml/2006/main">
               <a:ext uri="{FF2B5EF4-FFF2-40B4-BE49-F238E27FC236}">
-                <a16:creationId xmlns:a16="http://schemas.microsoft.com/office/drawing/2014/main" id="{D146E6A3-4A10-45DE-9CAC-B641FB7DD4B4}"/>
+                <a16:creationId xmlns:a16="http://schemas.microsoft.com/office/drawing/2014/main" id="{300BD3C5-B1F0-42BA-B378-6258063F3D57}"/>
               </a:ext>
             </a:extLst>
           </p:cNvPr>
@@ -9480,7 +9503,7 @@
           <p:cNvPr id="3" name="">
             <a:extLst xmlns:a="http://schemas.openxmlformats.org/drawingml/2006/main">
               <a:ext uri="{FF2B5EF4-FFF2-40B4-BE49-F238E27FC236}">
-                <a16:creationId xmlns:a16="http://schemas.microsoft.com/office/drawing/2014/main" id="{5EF912F2-DACF-4716-ABD2-F9970C869A24}"/>
+                <a16:creationId xmlns:a16="http://schemas.microsoft.com/office/drawing/2014/main" id="{453D7224-0DD1-4CAC-A7D0-08482EA971F5}"/>
               </a:ext>
             </a:extLst>
           </p:cNvPr>
@@ -9544,7 +9567,7 @@
           <p:cNvPr id="4" name="">
             <a:extLst xmlns:a="http://schemas.openxmlformats.org/drawingml/2006/main">
               <a:ext uri="{FF2B5EF4-FFF2-40B4-BE49-F238E27FC236}">
-                <a16:creationId xmlns:a16="http://schemas.microsoft.com/office/drawing/2014/main" id="{7BF87BDD-D6E7-4012-A610-F8FC75B086E3}"/>
+                <a16:creationId xmlns:a16="http://schemas.microsoft.com/office/drawing/2014/main" id="{90057807-CA01-4476-BB78-95C9184D2A9F}"/>
               </a:ext>
             </a:extLst>
           </p:cNvPr>
@@ -9608,7 +9631,7 @@
           <p:cNvPr id="5" name="">
             <a:extLst xmlns:a="http://schemas.openxmlformats.org/drawingml/2006/main">
               <a:ext uri="{FF2B5EF4-FFF2-40B4-BE49-F238E27FC236}">
-                <a16:creationId xmlns:a16="http://schemas.microsoft.com/office/drawing/2014/main" id="{8B02897F-11AE-41C3-89E4-C56387D976FB}"/>
+                <a16:creationId xmlns:a16="http://schemas.microsoft.com/office/drawing/2014/main" id="{4A84CF82-D9A4-4A40-90D1-5B119038A450}"/>
               </a:ext>
             </a:extLst>
           </p:cNvPr>
@@ -9641,7 +9664,7 @@
           <p:cNvPr id="6" name="">
             <a:extLst xmlns:a="http://schemas.openxmlformats.org/drawingml/2006/main">
               <a:ext uri="{FF2B5EF4-FFF2-40B4-BE49-F238E27FC236}">
-                <a16:creationId xmlns:a16="http://schemas.microsoft.com/office/drawing/2014/main" id="{87D553AF-ADF1-4FA9-B7BE-204312A86EFA}"/>
+                <a16:creationId xmlns:a16="http://schemas.microsoft.com/office/drawing/2014/main" id="{76F83039-3F1B-4DAF-A4C9-A872B1C6E74B}"/>
               </a:ext>
             </a:extLst>
           </p:cNvPr>
@@ -9674,7 +9697,7 @@
           <p:cNvPr id="7" name="">
             <a:extLst xmlns:a="http://schemas.openxmlformats.org/drawingml/2006/main">
               <a:ext uri="{FF2B5EF4-FFF2-40B4-BE49-F238E27FC236}">
-                <a16:creationId xmlns:a16="http://schemas.microsoft.com/office/drawing/2014/main" id="{92E47F0C-E37C-47AB-9B6F-29EA8A7AECB5}"/>
+                <a16:creationId xmlns:a16="http://schemas.microsoft.com/office/drawing/2014/main" id="{91E70165-E99C-4AC9-8199-A4F0DCEC5CBC}"/>
               </a:ext>
             </a:extLst>
           </p:cNvPr>
@@ -9707,7 +9730,7 @@
           <p:cNvPr id="8" name="">
             <a:extLst xmlns:a="http://schemas.openxmlformats.org/drawingml/2006/main">
               <a:ext uri="{FF2B5EF4-FFF2-40B4-BE49-F238E27FC236}">
-                <a16:creationId xmlns:a16="http://schemas.microsoft.com/office/drawing/2014/main" id="{9316A0CF-805A-4004-800E-615AAFBA22AB}"/>
+                <a16:creationId xmlns:a16="http://schemas.microsoft.com/office/drawing/2014/main" id="{7E66307D-6F25-4C75-ACEA-BDD487949074}"/>
               </a:ext>
             </a:extLst>
           </p:cNvPr>
@@ -9740,7 +9763,7 @@
           <p:cNvPr id="9" name="">
             <a:extLst xmlns:a="http://schemas.openxmlformats.org/drawingml/2006/main">
               <a:ext uri="{FF2B5EF4-FFF2-40B4-BE49-F238E27FC236}">
-                <a16:creationId xmlns:a16="http://schemas.microsoft.com/office/drawing/2014/main" id="{382E165F-A53C-49DB-9D94-0F76CC373F27}"/>
+                <a16:creationId xmlns:a16="http://schemas.microsoft.com/office/drawing/2014/main" id="{BB5BF57D-9E3E-4BBF-9438-66717DF9EDA2}"/>
               </a:ext>
             </a:extLst>
           </p:cNvPr>
@@ -9773,7 +9796,7 @@
           <p:cNvPr id="10" name="">
             <a:extLst xmlns:a="http://schemas.openxmlformats.org/drawingml/2006/main">
               <a:ext uri="{FF2B5EF4-FFF2-40B4-BE49-F238E27FC236}">
-                <a16:creationId xmlns:a16="http://schemas.microsoft.com/office/drawing/2014/main" id="{A848E3BE-155D-4146-9638-8500FEE8AF31}"/>
+                <a16:creationId xmlns:a16="http://schemas.microsoft.com/office/drawing/2014/main" id="{ABD1EB6E-4FDD-44C8-AF9E-FD96D58F13F1}"/>
               </a:ext>
             </a:extLst>
           </p:cNvPr>
@@ -9806,7 +9829,7 @@
           <p:cNvPr id="11" name="">
             <a:extLst xmlns:a="http://schemas.openxmlformats.org/drawingml/2006/main">
               <a:ext uri="{FF2B5EF4-FFF2-40B4-BE49-F238E27FC236}">
-                <a16:creationId xmlns:a16="http://schemas.microsoft.com/office/drawing/2014/main" id="{86BDA02E-D099-47F2-86AA-FEEBE38C349C}"/>
+                <a16:creationId xmlns:a16="http://schemas.microsoft.com/office/drawing/2014/main" id="{1C8F73B7-37BF-43E2-B973-6826C8AB9D3B}"/>
               </a:ext>
             </a:extLst>
           </p:cNvPr>
@@ -9870,7 +9893,7 @@
           <p:cNvPr id="12" name="">
             <a:extLst xmlns:a="http://schemas.openxmlformats.org/drawingml/2006/main">
               <a:ext uri="{FF2B5EF4-FFF2-40B4-BE49-F238E27FC236}">
-                <a16:creationId xmlns:a16="http://schemas.microsoft.com/office/drawing/2014/main" id="{9D32230D-0D17-404D-98D1-1990EC292E3D}"/>
+                <a16:creationId xmlns:a16="http://schemas.microsoft.com/office/drawing/2014/main" id="{13357DF6-6947-4095-9369-025EDA5E2E44}"/>
               </a:ext>
             </a:extLst>
           </p:cNvPr>
@@ -9903,7 +9926,7 @@
           <p:cNvPr id="13" name="">
             <a:extLst xmlns:a="http://schemas.openxmlformats.org/drawingml/2006/main">
               <a:ext uri="{FF2B5EF4-FFF2-40B4-BE49-F238E27FC236}">
-                <a16:creationId xmlns:a16="http://schemas.microsoft.com/office/drawing/2014/main" id="{3844CA58-CBA6-493D-AB1B-6F248717E441}"/>
+                <a16:creationId xmlns:a16="http://schemas.microsoft.com/office/drawing/2014/main" id="{9C47250C-B7D2-402F-ABC0-C42B404B8428}"/>
               </a:ext>
             </a:extLst>
           </p:cNvPr>
@@ -9967,7 +9990,7 @@
           <p:cNvPr id="14" name="">
             <a:extLst xmlns:a="http://schemas.openxmlformats.org/drawingml/2006/main">
               <a:ext uri="{FF2B5EF4-FFF2-40B4-BE49-F238E27FC236}">
-                <a16:creationId xmlns:a16="http://schemas.microsoft.com/office/drawing/2014/main" id="{60BE8A93-9EDD-4BC1-823E-CB267E32F98B}"/>
+                <a16:creationId xmlns:a16="http://schemas.microsoft.com/office/drawing/2014/main" id="{88E57E57-54B6-4F61-A58E-CA528EB7AEB9}"/>
               </a:ext>
             </a:extLst>
           </p:cNvPr>
@@ -10000,7 +10023,7 @@
           <p:cNvPr id="15" name="">
             <a:extLst xmlns:a="http://schemas.openxmlformats.org/drawingml/2006/main">
               <a:ext uri="{FF2B5EF4-FFF2-40B4-BE49-F238E27FC236}">
-                <a16:creationId xmlns:a16="http://schemas.microsoft.com/office/drawing/2014/main" id="{715AA659-5BA3-4583-9CEF-4E043EC052F8}"/>
+                <a16:creationId xmlns:a16="http://schemas.microsoft.com/office/drawing/2014/main" id="{35DDB7F7-63D2-4894-9F9E-BBD6F69A34C6}"/>
               </a:ext>
             </a:extLst>
           </p:cNvPr>
@@ -10064,7 +10087,7 @@
           <p:cNvPr id="16" name="">
             <a:extLst xmlns:a="http://schemas.openxmlformats.org/drawingml/2006/main">
               <a:ext uri="{FF2B5EF4-FFF2-40B4-BE49-F238E27FC236}">
-                <a16:creationId xmlns:a16="http://schemas.microsoft.com/office/drawing/2014/main" id="{968F390C-47F3-42B8-BB83-0C1554774E3C}"/>
+                <a16:creationId xmlns:a16="http://schemas.microsoft.com/office/drawing/2014/main" id="{B7A82FB6-BA44-4DDF-8177-04D8AE28DB2E}"/>
               </a:ext>
             </a:extLst>
           </p:cNvPr>
@@ -10128,7 +10151,7 @@
           <p:cNvPr id="17" name="">
             <a:extLst xmlns:a="http://schemas.openxmlformats.org/drawingml/2006/main">
               <a:ext uri="{FF2B5EF4-FFF2-40B4-BE49-F238E27FC236}">
-                <a16:creationId xmlns:a16="http://schemas.microsoft.com/office/drawing/2014/main" id="{025DA313-5948-4722-B104-A7F35A4D420D}"/>
+                <a16:creationId xmlns:a16="http://schemas.microsoft.com/office/drawing/2014/main" id="{3138336C-0370-4F5F-A93C-D5E7BA61F365}"/>
               </a:ext>
             </a:extLst>
           </p:cNvPr>
@@ -10188,7 +10211,7 @@
           <p:cNvPr id="18" name="">
             <a:extLst xmlns:a="http://schemas.openxmlformats.org/drawingml/2006/main">
               <a:ext uri="{FF2B5EF4-FFF2-40B4-BE49-F238E27FC236}">
-                <a16:creationId xmlns:a16="http://schemas.microsoft.com/office/drawing/2014/main" id="{1B102186-814C-4609-B18A-29E19EEDD446}"/>
+                <a16:creationId xmlns:a16="http://schemas.microsoft.com/office/drawing/2014/main" id="{AADA412D-3177-49C8-A14F-9B3CF165188C}"/>
               </a:ext>
             </a:extLst>
           </p:cNvPr>
@@ -10248,7 +10271,7 @@
           <p:cNvPr id="19" name="">
             <a:extLst xmlns:a="http://schemas.openxmlformats.org/drawingml/2006/main">
               <a:ext uri="{FF2B5EF4-FFF2-40B4-BE49-F238E27FC236}">
-                <a16:creationId xmlns:a16="http://schemas.microsoft.com/office/drawing/2014/main" id="{C2596D33-7409-447C-8E5C-FAE8222CEE2E}"/>
+                <a16:creationId xmlns:a16="http://schemas.microsoft.com/office/drawing/2014/main" id="{650728EE-6639-4B12-A51C-5B52A4E77C42}"/>
               </a:ext>
             </a:extLst>
           </p:cNvPr>
@@ -10308,7 +10331,7 @@
           <p:cNvPr id="20" name="">
             <a:extLst xmlns:a="http://schemas.openxmlformats.org/drawingml/2006/main">
               <a:ext uri="{FF2B5EF4-FFF2-40B4-BE49-F238E27FC236}">
-                <a16:creationId xmlns:a16="http://schemas.microsoft.com/office/drawing/2014/main" id="{8299E937-A30C-4CF9-B82A-7EF8D2F9F606}"/>
+                <a16:creationId xmlns:a16="http://schemas.microsoft.com/office/drawing/2014/main" id="{A48509A4-79CC-4A36-90CB-631798CFEFB2}"/>
               </a:ext>
             </a:extLst>
           </p:cNvPr>
@@ -10368,7 +10391,7 @@
           <p:cNvPr id="21" name="">
             <a:extLst xmlns:a="http://schemas.openxmlformats.org/drawingml/2006/main">
               <a:ext uri="{FF2B5EF4-FFF2-40B4-BE49-F238E27FC236}">
-                <a16:creationId xmlns:a16="http://schemas.microsoft.com/office/drawing/2014/main" id="{9A2EE0CD-4276-461B-9A52-AA87819E6CF8}"/>
+                <a16:creationId xmlns:a16="http://schemas.microsoft.com/office/drawing/2014/main" id="{483211B0-3E38-48DA-B66E-E397D93DE2FF}"/>
               </a:ext>
             </a:extLst>
           </p:cNvPr>
@@ -10428,7 +10451,7 @@
           <p:cNvPr id="22" name="">
             <a:extLst xmlns:a="http://schemas.openxmlformats.org/drawingml/2006/main">
               <a:ext uri="{FF2B5EF4-FFF2-40B4-BE49-F238E27FC236}">
-                <a16:creationId xmlns:a16="http://schemas.microsoft.com/office/drawing/2014/main" id="{888D203E-992A-455D-AD41-CE7740C5E771}"/>
+                <a16:creationId xmlns:a16="http://schemas.microsoft.com/office/drawing/2014/main" id="{F3E235B4-3D44-4324-975E-1A77EE57DBF2}"/>
               </a:ext>
             </a:extLst>
           </p:cNvPr>
@@ -10488,7 +10511,7 @@
           <p:cNvPr id="23" name="">
             <a:extLst xmlns:a="http://schemas.openxmlformats.org/drawingml/2006/main">
               <a:ext uri="{FF2B5EF4-FFF2-40B4-BE49-F238E27FC236}">
-                <a16:creationId xmlns:a16="http://schemas.microsoft.com/office/drawing/2014/main" id="{49534D77-3690-4E80-8D3A-6254BB22189E}"/>
+                <a16:creationId xmlns:a16="http://schemas.microsoft.com/office/drawing/2014/main" id="{F0F5ECB7-5C57-4CF2-8BC5-8CCABAEF5C3D}"/>
               </a:ext>
             </a:extLst>
           </p:cNvPr>
@@ -10548,7 +10571,7 @@
           <p:cNvPr id="24" name="">
             <a:extLst xmlns:a="http://schemas.openxmlformats.org/drawingml/2006/main">
               <a:ext uri="{FF2B5EF4-FFF2-40B4-BE49-F238E27FC236}">
-                <a16:creationId xmlns:a16="http://schemas.microsoft.com/office/drawing/2014/main" id="{02268DB6-6433-4E6D-98EF-1F52A78729B8}"/>
+                <a16:creationId xmlns:a16="http://schemas.microsoft.com/office/drawing/2014/main" id="{A6C83A20-134B-4796-801B-C849772251DF}"/>
               </a:ext>
             </a:extLst>
           </p:cNvPr>
@@ -10581,7 +10604,7 @@
           <p:cNvPr id="25" name="">
             <a:extLst xmlns:a="http://schemas.openxmlformats.org/drawingml/2006/main">
               <a:ext uri="{FF2B5EF4-FFF2-40B4-BE49-F238E27FC236}">
-                <a16:creationId xmlns:a16="http://schemas.microsoft.com/office/drawing/2014/main" id="{4A4029EB-17F0-4245-BE3C-B83F5D79E0A4}"/>
+                <a16:creationId xmlns:a16="http://schemas.microsoft.com/office/drawing/2014/main" id="{D1CB382A-E525-49DC-943F-80DF6B2BDD66}"/>
               </a:ext>
             </a:extLst>
           </p:cNvPr>
@@ -10645,7 +10668,7 @@
           <p:cNvPr id="26" name="">
             <a:extLst xmlns:a="http://schemas.openxmlformats.org/drawingml/2006/main">
               <a:ext uri="{FF2B5EF4-FFF2-40B4-BE49-F238E27FC236}">
-                <a16:creationId xmlns:a16="http://schemas.microsoft.com/office/drawing/2014/main" id="{09646CD5-A131-47B6-987D-9067754E664B}"/>
+                <a16:creationId xmlns:a16="http://schemas.microsoft.com/office/drawing/2014/main" id="{B9A72F3F-AB7B-4D42-BDC0-5D5DB00ACBFD}"/>
               </a:ext>
             </a:extLst>
           </p:cNvPr>
@@ -10678,7 +10701,7 @@
           <p:cNvPr id="27" name="">
             <a:extLst xmlns:a="http://schemas.openxmlformats.org/drawingml/2006/main">
               <a:ext uri="{FF2B5EF4-FFF2-40B4-BE49-F238E27FC236}">
-                <a16:creationId xmlns:a16="http://schemas.microsoft.com/office/drawing/2014/main" id="{5CDA9CA6-165D-45FF-9AE6-0A5E72FE4B4F}"/>
+                <a16:creationId xmlns:a16="http://schemas.microsoft.com/office/drawing/2014/main" id="{475D0AE2-EFE1-48B0-9CE5-58F3049BDEE7}"/>
               </a:ext>
             </a:extLst>
           </p:cNvPr>
@@ -10742,7 +10765,7 @@
           <p:cNvPr id="28" name="">
             <a:extLst xmlns:a="http://schemas.openxmlformats.org/drawingml/2006/main">
               <a:ext uri="{FF2B5EF4-FFF2-40B4-BE49-F238E27FC236}">
-                <a16:creationId xmlns:a16="http://schemas.microsoft.com/office/drawing/2014/main" id="{502ABDE9-6458-467B-9EB8-F9BC903554EA}"/>
+                <a16:creationId xmlns:a16="http://schemas.microsoft.com/office/drawing/2014/main" id="{5CCB7112-CB4F-4C59-AEF2-273883AB1956}"/>
               </a:ext>
             </a:extLst>
           </p:cNvPr>
@@ -10775,7 +10798,7 @@
           <p:cNvPr id="29" name="">
             <a:extLst xmlns:a="http://schemas.openxmlformats.org/drawingml/2006/main">
               <a:ext uri="{FF2B5EF4-FFF2-40B4-BE49-F238E27FC236}">
-                <a16:creationId xmlns:a16="http://schemas.microsoft.com/office/drawing/2014/main" id="{22BAEDDA-01C7-4031-ABB3-99E2D9AC9D54}"/>
+                <a16:creationId xmlns:a16="http://schemas.microsoft.com/office/drawing/2014/main" id="{AC91C11F-A118-4A13-B1D5-E73393672C9D}"/>
               </a:ext>
             </a:extLst>
           </p:cNvPr>
@@ -10839,7 +10862,7 @@
           <p:cNvPr id="30" name="">
             <a:extLst xmlns:a="http://schemas.openxmlformats.org/drawingml/2006/main">
               <a:ext uri="{FF2B5EF4-FFF2-40B4-BE49-F238E27FC236}">
-                <a16:creationId xmlns:a16="http://schemas.microsoft.com/office/drawing/2014/main" id="{512A596B-FB12-4A0D-800A-EF5C6A85CD42}"/>
+                <a16:creationId xmlns:a16="http://schemas.microsoft.com/office/drawing/2014/main" id="{B31C7025-B7A2-45CE-9C4A-AB08A2AB3DA8}"/>
               </a:ext>
             </a:extLst>
           </p:cNvPr>
@@ -10899,7 +10922,7 @@
           <p:cNvPr id="31" name="">
             <a:extLst xmlns:a="http://schemas.openxmlformats.org/drawingml/2006/main">
               <a:ext uri="{FF2B5EF4-FFF2-40B4-BE49-F238E27FC236}">
-                <a16:creationId xmlns:a16="http://schemas.microsoft.com/office/drawing/2014/main" id="{D6138BF8-48F8-408A-9AC4-D91E6CBB41F4}"/>
+                <a16:creationId xmlns:a16="http://schemas.microsoft.com/office/drawing/2014/main" id="{5DF53884-C8EC-4C5E-AF6B-5AEE3BACCBA5}"/>
               </a:ext>
             </a:extLst>
           </p:cNvPr>
@@ -10963,7 +10986,7 @@
           <p:cNvPr id="32" name="">
             <a:extLst xmlns:a="http://schemas.openxmlformats.org/drawingml/2006/main">
               <a:ext uri="{FF2B5EF4-FFF2-40B4-BE49-F238E27FC236}">
-                <a16:creationId xmlns:a16="http://schemas.microsoft.com/office/drawing/2014/main" id="{4EA676E1-0CC8-4563-A4D9-21BDAAA5D99A}"/>
+                <a16:creationId xmlns:a16="http://schemas.microsoft.com/office/drawing/2014/main" id="{2D08753C-1C33-4211-BF1F-E829BEBC30CE}"/>
               </a:ext>
             </a:extLst>
           </p:cNvPr>
@@ -10996,7 +11019,7 @@
           <p:cNvPr id="33" name="">
             <a:extLst xmlns:a="http://schemas.openxmlformats.org/drawingml/2006/main">
               <a:ext uri="{FF2B5EF4-FFF2-40B4-BE49-F238E27FC236}">
-                <a16:creationId xmlns:a16="http://schemas.microsoft.com/office/drawing/2014/main" id="{7EBDE546-35FB-41E0-B7E6-D36EC389BC5A}"/>
+                <a16:creationId xmlns:a16="http://schemas.microsoft.com/office/drawing/2014/main" id="{9D22CBB7-1A49-48CC-85DE-D74CDC5D8B33}"/>
               </a:ext>
             </a:extLst>
           </p:cNvPr>
@@ -11060,7 +11083,7 @@
           <p:cNvPr id="34" name="">
             <a:extLst xmlns:a="http://schemas.openxmlformats.org/drawingml/2006/main">
               <a:ext uri="{FF2B5EF4-FFF2-40B4-BE49-F238E27FC236}">
-                <a16:creationId xmlns:a16="http://schemas.microsoft.com/office/drawing/2014/main" id="{7AF69199-8656-4E87-A0B1-3511D08DC1F7}"/>
+                <a16:creationId xmlns:a16="http://schemas.microsoft.com/office/drawing/2014/main" id="{6D72D47D-B2F0-4C2E-A04F-3BEC56E721A0}"/>
               </a:ext>
             </a:extLst>
           </p:cNvPr>
@@ -11093,7 +11116,7 @@
           <p:cNvPr id="35" name="">
             <a:extLst xmlns:a="http://schemas.openxmlformats.org/drawingml/2006/main">
               <a:ext uri="{FF2B5EF4-FFF2-40B4-BE49-F238E27FC236}">
-                <a16:creationId xmlns:a16="http://schemas.microsoft.com/office/drawing/2014/main" id="{8A312527-7D54-4E16-922D-63BA1B74B1BC}"/>
+                <a16:creationId xmlns:a16="http://schemas.microsoft.com/office/drawing/2014/main" id="{004AC65A-2864-4C8C-B07F-69B67E6F137B}"/>
               </a:ext>
             </a:extLst>
           </p:cNvPr>
@@ -11157,7 +11180,7 @@
           <p:cNvPr id="36" name="">
             <a:extLst xmlns:a="http://schemas.openxmlformats.org/drawingml/2006/main">
               <a:ext uri="{FF2B5EF4-FFF2-40B4-BE49-F238E27FC236}">
-                <a16:creationId xmlns:a16="http://schemas.microsoft.com/office/drawing/2014/main" id="{89720BBF-86DC-455B-8C76-B1FAA33DDDD4}"/>
+                <a16:creationId xmlns:a16="http://schemas.microsoft.com/office/drawing/2014/main" id="{BA53E42E-0CD8-452B-A4E4-F157E5EEC315}"/>
               </a:ext>
             </a:extLst>
           </p:cNvPr>
@@ -11190,7 +11213,7 @@
           <p:cNvPr id="37" name="">
             <a:extLst xmlns:a="http://schemas.openxmlformats.org/drawingml/2006/main">
               <a:ext uri="{FF2B5EF4-FFF2-40B4-BE49-F238E27FC236}">
-                <a16:creationId xmlns:a16="http://schemas.microsoft.com/office/drawing/2014/main" id="{7831E22F-5A9A-41DA-8B26-3DD2BB84A0D2}"/>
+                <a16:creationId xmlns:a16="http://schemas.microsoft.com/office/drawing/2014/main" id="{3DDAEE64-5054-4BB7-9F85-921E8987C6F7}"/>
               </a:ext>
             </a:extLst>
           </p:cNvPr>
@@ -11254,7 +11277,7 @@
           <p:cNvPr id="38" name="">
             <a:extLst xmlns:a="http://schemas.openxmlformats.org/drawingml/2006/main">
               <a:ext uri="{FF2B5EF4-FFF2-40B4-BE49-F238E27FC236}">
-                <a16:creationId xmlns:a16="http://schemas.microsoft.com/office/drawing/2014/main" id="{5D2D4C02-F9DF-4F96-A798-A1FD9462D00E}"/>
+                <a16:creationId xmlns:a16="http://schemas.microsoft.com/office/drawing/2014/main" id="{326E42FE-7DB7-4C61-9B25-BB42B8EC87C8}"/>
               </a:ext>
             </a:extLst>
           </p:cNvPr>
@@ -11287,7 +11310,7 @@
           <p:cNvPr id="39" name="">
             <a:extLst xmlns:a="http://schemas.openxmlformats.org/drawingml/2006/main">
               <a:ext uri="{FF2B5EF4-FFF2-40B4-BE49-F238E27FC236}">
-                <a16:creationId xmlns:a16="http://schemas.microsoft.com/office/drawing/2014/main" id="{3ECA03C9-1E02-4D8A-9FF6-63D61E7AB483}"/>
+                <a16:creationId xmlns:a16="http://schemas.microsoft.com/office/drawing/2014/main" id="{DB3A85BB-AE72-47FB-9331-135FD9AD691E}"/>
               </a:ext>
             </a:extLst>
           </p:cNvPr>
@@ -11349,7 +11372,7 @@
     </p:spTree>
     <p:extLst>
       <p:ext uri="{BB962C8B-B14F-4D97-AF65-F5344CB8AC3E}">
-        <p14:creationId xmlns:p14="http://schemas.microsoft.com/office/powerpoint/2010/main" val="705086447"/>
+        <p14:creationId xmlns:p14="http://schemas.microsoft.com/office/powerpoint/2010/main" val="1534500507"/>
       </p:ext>
     </p:extLst>
   </p:cSld>
@@ -11373,7 +11396,7 @@
           <p:cNvPr id="1" name="">
             <a:extLst xmlns:a="http://schemas.openxmlformats.org/drawingml/2006/main">
               <a:ext uri="{FF2B5EF4-FFF2-40B4-BE49-F238E27FC236}">
-                <a16:creationId xmlns:a16="http://schemas.microsoft.com/office/drawing/2014/main" id="{82511BE9-BAC6-4445-AC92-48EAD122864F}"/>
+                <a16:creationId xmlns:a16="http://schemas.microsoft.com/office/drawing/2014/main" id="{3F4AE1FC-86C7-45E9-86EA-B9E2B9441A6B}"/>
               </a:ext>
             </a:extLst>
           </p:cNvPr>
@@ -11408,7 +11431,7 @@
           <p:cNvPr id="2" name="">
             <a:extLst xmlns:a="http://schemas.openxmlformats.org/drawingml/2006/main">
               <a:ext uri="{FF2B5EF4-FFF2-40B4-BE49-F238E27FC236}">
-                <a16:creationId xmlns:a16="http://schemas.microsoft.com/office/drawing/2014/main" id="{7188537B-EDC2-4AE2-8D81-4EDB185C0E30}"/>
+                <a16:creationId xmlns:a16="http://schemas.microsoft.com/office/drawing/2014/main" id="{4ECDBC9D-940F-434C-8506-52EFBC166684}"/>
               </a:ext>
             </a:extLst>
           </p:cNvPr>
@@ -11472,7 +11495,7 @@
           <p:cNvPr id="3" name="">
             <a:extLst xmlns:a="http://schemas.openxmlformats.org/drawingml/2006/main">
               <a:ext uri="{FF2B5EF4-FFF2-40B4-BE49-F238E27FC236}">
-                <a16:creationId xmlns:a16="http://schemas.microsoft.com/office/drawing/2014/main" id="{F8CE07EC-2E9B-4108-9BEF-D18D841F83F4}"/>
+                <a16:creationId xmlns:a16="http://schemas.microsoft.com/office/drawing/2014/main" id="{0BED6BD6-B9EB-48BC-A1B3-9B0610DF7D2D}"/>
               </a:ext>
             </a:extLst>
           </p:cNvPr>
@@ -11536,7 +11559,7 @@
           <p:cNvPr id="4" name="">
             <a:extLst xmlns:a="http://schemas.openxmlformats.org/drawingml/2006/main">
               <a:ext uri="{FF2B5EF4-FFF2-40B4-BE49-F238E27FC236}">
-                <a16:creationId xmlns:a16="http://schemas.microsoft.com/office/drawing/2014/main" id="{42FD36EF-2DF0-4874-A51D-00A276942174}"/>
+                <a16:creationId xmlns:a16="http://schemas.microsoft.com/office/drawing/2014/main" id="{649B25B9-33BA-4DD4-A8EE-03E38C43E343}"/>
               </a:ext>
             </a:extLst>
           </p:cNvPr>
@@ -11600,7 +11623,7 @@
           <p:cNvPr id="5" name="">
             <a:extLst xmlns:a="http://schemas.openxmlformats.org/drawingml/2006/main">
               <a:ext uri="{FF2B5EF4-FFF2-40B4-BE49-F238E27FC236}">
-                <a16:creationId xmlns:a16="http://schemas.microsoft.com/office/drawing/2014/main" id="{A10FFF04-D825-4332-8C33-258A1B922469}"/>
+                <a16:creationId xmlns:a16="http://schemas.microsoft.com/office/drawing/2014/main" id="{28046E1C-55D1-42B2-BFE9-77E084CB3A9D}"/>
               </a:ext>
             </a:extLst>
           </p:cNvPr>
@@ -11633,7 +11656,7 @@
           <p:cNvPr id="6" name="">
             <a:extLst xmlns:a="http://schemas.openxmlformats.org/drawingml/2006/main">
               <a:ext uri="{FF2B5EF4-FFF2-40B4-BE49-F238E27FC236}">
-                <a16:creationId xmlns:a16="http://schemas.microsoft.com/office/drawing/2014/main" id="{4D26E507-DE56-45E4-9A94-2B7F4E2D0ADC}"/>
+                <a16:creationId xmlns:a16="http://schemas.microsoft.com/office/drawing/2014/main" id="{3FEFD195-301F-4835-B175-397C9025B645}"/>
               </a:ext>
             </a:extLst>
           </p:cNvPr>
@@ -11697,7 +11720,7 @@
           <p:cNvPr id="7" name="">
             <a:extLst xmlns:a="http://schemas.openxmlformats.org/drawingml/2006/main">
               <a:ext uri="{FF2B5EF4-FFF2-40B4-BE49-F238E27FC236}">
-                <a16:creationId xmlns:a16="http://schemas.microsoft.com/office/drawing/2014/main" id="{C4624160-6A57-47AF-9E81-34C2379309C3}"/>
+                <a16:creationId xmlns:a16="http://schemas.microsoft.com/office/drawing/2014/main" id="{AC8FB334-4792-4F3A-B1F8-EBBFA0EC4308}"/>
               </a:ext>
             </a:extLst>
           </p:cNvPr>
@@ -11759,7 +11782,7 @@
           <p:cNvPr id="8" name="">
             <a:extLst xmlns:a="http://schemas.openxmlformats.org/drawingml/2006/main">
               <a:ext uri="{FF2B5EF4-FFF2-40B4-BE49-F238E27FC236}">
-                <a16:creationId xmlns:a16="http://schemas.microsoft.com/office/drawing/2014/main" id="{431D61D2-24A8-44F6-8AB1-EB58E186275C}"/>
+                <a16:creationId xmlns:a16="http://schemas.microsoft.com/office/drawing/2014/main" id="{00255ED5-424A-4C50-8186-F440D6DF4C36}"/>
               </a:ext>
             </a:extLst>
           </p:cNvPr>
@@ -11823,7 +11846,7 @@
           <p:cNvPr id="9" name="">
             <a:extLst xmlns:a="http://schemas.openxmlformats.org/drawingml/2006/main">
               <a:ext uri="{FF2B5EF4-FFF2-40B4-BE49-F238E27FC236}">
-                <a16:creationId xmlns:a16="http://schemas.microsoft.com/office/drawing/2014/main" id="{8C6802D4-AE57-4AD5-8C5D-24927CA410D7}"/>
+                <a16:creationId xmlns:a16="http://schemas.microsoft.com/office/drawing/2014/main" id="{9EDEA2CB-7529-4B9A-A9D4-F8009D6A5752}"/>
               </a:ext>
             </a:extLst>
           </p:cNvPr>
@@ -11885,7 +11908,7 @@
           <p:cNvPr id="10" name="">
             <a:extLst xmlns:a="http://schemas.openxmlformats.org/drawingml/2006/main">
               <a:ext uri="{FF2B5EF4-FFF2-40B4-BE49-F238E27FC236}">
-                <a16:creationId xmlns:a16="http://schemas.microsoft.com/office/drawing/2014/main" id="{437E1138-DD09-411B-9A95-5C895E89AE99}"/>
+                <a16:creationId xmlns:a16="http://schemas.microsoft.com/office/drawing/2014/main" id="{33C36131-143F-423A-B990-8EEDFA3FD699}"/>
               </a:ext>
             </a:extLst>
           </p:cNvPr>
@@ -11949,7 +11972,7 @@
           <p:cNvPr id="11" name="">
             <a:extLst xmlns:a="http://schemas.openxmlformats.org/drawingml/2006/main">
               <a:ext uri="{FF2B5EF4-FFF2-40B4-BE49-F238E27FC236}">
-                <a16:creationId xmlns:a16="http://schemas.microsoft.com/office/drawing/2014/main" id="{E2046418-FE51-40D7-9170-F62D99713A9E}"/>
+                <a16:creationId xmlns:a16="http://schemas.microsoft.com/office/drawing/2014/main" id="{A9DA7985-387C-4806-8BD0-3E24342B3FF6}"/>
               </a:ext>
             </a:extLst>
           </p:cNvPr>
@@ -12011,7 +12034,7 @@
           <p:cNvPr id="12" name="">
             <a:extLst xmlns:a="http://schemas.openxmlformats.org/drawingml/2006/main">
               <a:ext uri="{FF2B5EF4-FFF2-40B4-BE49-F238E27FC236}">
-                <a16:creationId xmlns:a16="http://schemas.microsoft.com/office/drawing/2014/main" id="{8635779D-93A8-4BC2-8C0C-9FD95712870D}"/>
+                <a16:creationId xmlns:a16="http://schemas.microsoft.com/office/drawing/2014/main" id="{061F4154-8794-4190-8C83-10419160C790}"/>
               </a:ext>
             </a:extLst>
           </p:cNvPr>
@@ -12075,7 +12098,7 @@
           <p:cNvPr id="13" name="">
             <a:extLst xmlns:a="http://schemas.openxmlformats.org/drawingml/2006/main">
               <a:ext uri="{FF2B5EF4-FFF2-40B4-BE49-F238E27FC236}">
-                <a16:creationId xmlns:a16="http://schemas.microsoft.com/office/drawing/2014/main" id="{773C8656-6D22-4CE4-9803-4F16A0B3DA12}"/>
+                <a16:creationId xmlns:a16="http://schemas.microsoft.com/office/drawing/2014/main" id="{801BED1C-43F7-4B1B-AE6C-B59E2157A789}"/>
               </a:ext>
             </a:extLst>
           </p:cNvPr>
@@ -12137,7 +12160,7 @@
           <p:cNvPr id="14" name="">
             <a:extLst xmlns:a="http://schemas.openxmlformats.org/drawingml/2006/main">
               <a:ext uri="{FF2B5EF4-FFF2-40B4-BE49-F238E27FC236}">
-                <a16:creationId xmlns:a16="http://schemas.microsoft.com/office/drawing/2014/main" id="{4EB81CD9-BEF4-4B3C-89A0-CB791B37A6E0}"/>
+                <a16:creationId xmlns:a16="http://schemas.microsoft.com/office/drawing/2014/main" id="{4D1921BF-ED9D-40B5-9261-75F8EB442605}"/>
               </a:ext>
             </a:extLst>
           </p:cNvPr>
@@ -12201,7 +12224,7 @@
           <p:cNvPr id="15" name="">
             <a:extLst xmlns:a="http://schemas.openxmlformats.org/drawingml/2006/main">
               <a:ext uri="{FF2B5EF4-FFF2-40B4-BE49-F238E27FC236}">
-                <a16:creationId xmlns:a16="http://schemas.microsoft.com/office/drawing/2014/main" id="{E5A066A8-E806-44CF-AD3B-C16A16B8542F}"/>
+                <a16:creationId xmlns:a16="http://schemas.microsoft.com/office/drawing/2014/main" id="{235C61CB-D4A6-4664-838B-D7F8FCE3E6EE}"/>
               </a:ext>
             </a:extLst>
           </p:cNvPr>
@@ -12263,7 +12286,7 @@
           <p:cNvPr id="16" name="">
             <a:extLst xmlns:a="http://schemas.openxmlformats.org/drawingml/2006/main">
               <a:ext uri="{FF2B5EF4-FFF2-40B4-BE49-F238E27FC236}">
-                <a16:creationId xmlns:a16="http://schemas.microsoft.com/office/drawing/2014/main" id="{B44E87BD-B9B0-4980-843B-1BF3D69DF6D8}"/>
+                <a16:creationId xmlns:a16="http://schemas.microsoft.com/office/drawing/2014/main" id="{77419FA3-BB32-458F-9C4E-690C68B0216A}"/>
               </a:ext>
             </a:extLst>
           </p:cNvPr>
@@ -12327,7 +12350,7 @@
           <p:cNvPr id="17" name="">
             <a:extLst xmlns:a="http://schemas.openxmlformats.org/drawingml/2006/main">
               <a:ext uri="{FF2B5EF4-FFF2-40B4-BE49-F238E27FC236}">
-                <a16:creationId xmlns:a16="http://schemas.microsoft.com/office/drawing/2014/main" id="{0D17831C-0B63-4A02-8522-0510675D3F61}"/>
+                <a16:creationId xmlns:a16="http://schemas.microsoft.com/office/drawing/2014/main" id="{8DF6D779-AAE5-4772-8272-55B3E0887067}"/>
               </a:ext>
             </a:extLst>
           </p:cNvPr>
@@ -12360,7 +12383,7 @@
           <p:cNvPr id="18" name="">
             <a:extLst xmlns:a="http://schemas.openxmlformats.org/drawingml/2006/main">
               <a:ext uri="{FF2B5EF4-FFF2-40B4-BE49-F238E27FC236}">
-                <a16:creationId xmlns:a16="http://schemas.microsoft.com/office/drawing/2014/main" id="{B71D10F7-4A7E-44D7-9822-AC58EA242C8F}"/>
+                <a16:creationId xmlns:a16="http://schemas.microsoft.com/office/drawing/2014/main" id="{BF47EAA9-B61D-42CB-9CD1-49EA5EB18ECF}"/>
               </a:ext>
             </a:extLst>
           </p:cNvPr>
@@ -12424,7 +12447,7 @@
           <p:cNvPr id="19" name="">
             <a:extLst xmlns:a="http://schemas.openxmlformats.org/drawingml/2006/main">
               <a:ext uri="{FF2B5EF4-FFF2-40B4-BE49-F238E27FC236}">
-                <a16:creationId xmlns:a16="http://schemas.microsoft.com/office/drawing/2014/main" id="{3F478743-78E6-47A3-AEA2-CD93FD47F927}"/>
+                <a16:creationId xmlns:a16="http://schemas.microsoft.com/office/drawing/2014/main" id="{463CC94A-56CE-4066-BE9E-1F34ED8DEAE4}"/>
               </a:ext>
             </a:extLst>
           </p:cNvPr>
@@ -12488,7 +12511,7 @@
           <p:cNvPr id="20" name="">
             <a:extLst xmlns:a="http://schemas.openxmlformats.org/drawingml/2006/main">
               <a:ext uri="{FF2B5EF4-FFF2-40B4-BE49-F238E27FC236}">
-                <a16:creationId xmlns:a16="http://schemas.microsoft.com/office/drawing/2014/main" id="{15FFF8F2-E8C1-4A8B-ACC5-E1BDD82E683B}"/>
+                <a16:creationId xmlns:a16="http://schemas.microsoft.com/office/drawing/2014/main" id="{13107E72-C5A1-47E3-AE66-4845A2DD7431}"/>
               </a:ext>
             </a:extLst>
           </p:cNvPr>
@@ -12548,7 +12571,7 @@
           <p:cNvPr id="21" name="">
             <a:extLst xmlns:a="http://schemas.openxmlformats.org/drawingml/2006/main">
               <a:ext uri="{FF2B5EF4-FFF2-40B4-BE49-F238E27FC236}">
-                <a16:creationId xmlns:a16="http://schemas.microsoft.com/office/drawing/2014/main" id="{A6A6FD1A-4A29-42A8-A695-3F36436DBE7D}"/>
+                <a16:creationId xmlns:a16="http://schemas.microsoft.com/office/drawing/2014/main" id="{A63ECEDA-1D9F-4D28-85B5-1371D55ABE76}"/>
               </a:ext>
             </a:extLst>
           </p:cNvPr>
@@ -12612,7 +12635,7 @@
           <p:cNvPr id="22" name="">
             <a:extLst xmlns:a="http://schemas.openxmlformats.org/drawingml/2006/main">
               <a:ext uri="{FF2B5EF4-FFF2-40B4-BE49-F238E27FC236}">
-                <a16:creationId xmlns:a16="http://schemas.microsoft.com/office/drawing/2014/main" id="{B10BCF79-A695-43E2-81FE-A3F7DDC295E9}"/>
+                <a16:creationId xmlns:a16="http://schemas.microsoft.com/office/drawing/2014/main" id="{53962689-1D8D-4F8D-B48E-98A4D83B4482}"/>
               </a:ext>
             </a:extLst>
           </p:cNvPr>
@@ -12672,7 +12695,7 @@
           <p:cNvPr id="23" name="">
             <a:extLst xmlns:a="http://schemas.openxmlformats.org/drawingml/2006/main">
               <a:ext uri="{FF2B5EF4-FFF2-40B4-BE49-F238E27FC236}">
-                <a16:creationId xmlns:a16="http://schemas.microsoft.com/office/drawing/2014/main" id="{63B82C03-0DE9-4487-9514-37D0F3997C10}"/>
+                <a16:creationId xmlns:a16="http://schemas.microsoft.com/office/drawing/2014/main" id="{5F1A8636-0E38-40BF-8BD9-9D99330441AD}"/>
               </a:ext>
             </a:extLst>
           </p:cNvPr>
@@ -12736,7 +12759,7 @@
           <p:cNvPr id="24" name="">
             <a:extLst xmlns:a="http://schemas.openxmlformats.org/drawingml/2006/main">
               <a:ext uri="{FF2B5EF4-FFF2-40B4-BE49-F238E27FC236}">
-                <a16:creationId xmlns:a16="http://schemas.microsoft.com/office/drawing/2014/main" id="{FC3D2642-BE5C-4B2B-B3B4-6A9E2441F33F}"/>
+                <a16:creationId xmlns:a16="http://schemas.microsoft.com/office/drawing/2014/main" id="{835E21F9-15D9-4F2A-BA8B-92E63A390B5E}"/>
               </a:ext>
             </a:extLst>
           </p:cNvPr>
@@ -12796,7 +12819,7 @@
           <p:cNvPr id="25" name="">
             <a:extLst xmlns:a="http://schemas.openxmlformats.org/drawingml/2006/main">
               <a:ext uri="{FF2B5EF4-FFF2-40B4-BE49-F238E27FC236}">
-                <a16:creationId xmlns:a16="http://schemas.microsoft.com/office/drawing/2014/main" id="{6AD130C4-80B5-48F9-B737-CD42FA6B0371}"/>
+                <a16:creationId xmlns:a16="http://schemas.microsoft.com/office/drawing/2014/main" id="{DFA2E3DD-5C19-46E3-BB93-92600A4E4984}"/>
               </a:ext>
             </a:extLst>
           </p:cNvPr>
@@ -12829,7 +12852,7 @@
           <p:cNvPr id="26" name="">
             <a:extLst xmlns:a="http://schemas.openxmlformats.org/drawingml/2006/main">
               <a:ext uri="{FF2B5EF4-FFF2-40B4-BE49-F238E27FC236}">
-                <a16:creationId xmlns:a16="http://schemas.microsoft.com/office/drawing/2014/main" id="{26F86CE2-2065-42CB-93E6-AE3F1239A8B8}"/>
+                <a16:creationId xmlns:a16="http://schemas.microsoft.com/office/drawing/2014/main" id="{40F456AA-5B0B-4849-A894-858A4AB7D3E1}"/>
               </a:ext>
             </a:extLst>
           </p:cNvPr>
@@ -12891,7 +12914,7 @@
     </p:spTree>
     <p:extLst>
       <p:ext uri="{BB962C8B-B14F-4D97-AF65-F5344CB8AC3E}">
-        <p14:creationId xmlns:p14="http://schemas.microsoft.com/office/powerpoint/2010/main" val="1194899549"/>
+        <p14:creationId xmlns:p14="http://schemas.microsoft.com/office/powerpoint/2010/main" val="1395634464"/>
       </p:ext>
     </p:extLst>
   </p:cSld>
@@ -12915,7 +12938,7 @@
           <p:cNvPr id="1" name="">
             <a:extLst xmlns:a="http://schemas.openxmlformats.org/drawingml/2006/main">
               <a:ext uri="{FF2B5EF4-FFF2-40B4-BE49-F238E27FC236}">
-                <a16:creationId xmlns:a16="http://schemas.microsoft.com/office/drawing/2014/main" id="{1DD37DF1-8726-4961-97F0-6CE9371AE882}"/>
+                <a16:creationId xmlns:a16="http://schemas.microsoft.com/office/drawing/2014/main" id="{2972E850-E102-4840-888D-E0A8E128E96E}"/>
               </a:ext>
             </a:extLst>
           </p:cNvPr>
@@ -12950,7 +12973,7 @@
           <p:cNvPr id="2" name="">
             <a:extLst xmlns:a="http://schemas.openxmlformats.org/drawingml/2006/main">
               <a:ext uri="{FF2B5EF4-FFF2-40B4-BE49-F238E27FC236}">
-                <a16:creationId xmlns:a16="http://schemas.microsoft.com/office/drawing/2014/main" id="{AD7755EE-278D-4F26-82B9-8F949FDD718A}"/>
+                <a16:creationId xmlns:a16="http://schemas.microsoft.com/office/drawing/2014/main" id="{F69C0EE9-BB51-4190-840B-A7C9340CCC51}"/>
               </a:ext>
             </a:extLst>
           </p:cNvPr>
@@ -13014,7 +13037,7 @@
           <p:cNvPr id="3" name="">
             <a:extLst xmlns:a="http://schemas.openxmlformats.org/drawingml/2006/main">
               <a:ext uri="{FF2B5EF4-FFF2-40B4-BE49-F238E27FC236}">
-                <a16:creationId xmlns:a16="http://schemas.microsoft.com/office/drawing/2014/main" id="{82613258-F83F-4C5F-88D9-750F9CC5426A}"/>
+                <a16:creationId xmlns:a16="http://schemas.microsoft.com/office/drawing/2014/main" id="{5CB27867-CE75-430B-9202-C57E9F46C19B}"/>
               </a:ext>
             </a:extLst>
           </p:cNvPr>
@@ -13078,7 +13101,7 @@
           <p:cNvPr id="4" name="">
             <a:extLst xmlns:a="http://schemas.openxmlformats.org/drawingml/2006/main">
               <a:ext uri="{FF2B5EF4-FFF2-40B4-BE49-F238E27FC236}">
-                <a16:creationId xmlns:a16="http://schemas.microsoft.com/office/drawing/2014/main" id="{9B02D786-AE93-45C7-B005-E5F86E9A73D8}"/>
+                <a16:creationId xmlns:a16="http://schemas.microsoft.com/office/drawing/2014/main" id="{C1345F2E-4F88-4EB7-B961-C916C6B4A978}"/>
               </a:ext>
             </a:extLst>
           </p:cNvPr>
@@ -13142,7 +13165,7 @@
           <p:cNvPr id="5" name="">
             <a:extLst xmlns:a="http://schemas.openxmlformats.org/drawingml/2006/main">
               <a:ext uri="{FF2B5EF4-FFF2-40B4-BE49-F238E27FC236}">
-                <a16:creationId xmlns:a16="http://schemas.microsoft.com/office/drawing/2014/main" id="{93998BBC-F7C1-4641-9B16-C26E576973EE}"/>
+                <a16:creationId xmlns:a16="http://schemas.microsoft.com/office/drawing/2014/main" id="{81D26436-9610-49E2-84E0-5BE039132F07}"/>
               </a:ext>
             </a:extLst>
           </p:cNvPr>
@@ -13175,7 +13198,7 @@
           <p:cNvPr id="6" name="">
             <a:extLst xmlns:a="http://schemas.openxmlformats.org/drawingml/2006/main">
               <a:ext uri="{FF2B5EF4-FFF2-40B4-BE49-F238E27FC236}">
-                <a16:creationId xmlns:a16="http://schemas.microsoft.com/office/drawing/2014/main" id="{A7453D42-3878-4954-9BB2-45E7A9D341B7}"/>
+                <a16:creationId xmlns:a16="http://schemas.microsoft.com/office/drawing/2014/main" id="{A7A5CB68-B591-44FB-8D5D-CCA76DD61D88}"/>
               </a:ext>
             </a:extLst>
           </p:cNvPr>
@@ -13208,7 +13231,7 @@
           <p:cNvPr id="7" name="">
             <a:extLst xmlns:a="http://schemas.openxmlformats.org/drawingml/2006/main">
               <a:ext uri="{FF2B5EF4-FFF2-40B4-BE49-F238E27FC236}">
-                <a16:creationId xmlns:a16="http://schemas.microsoft.com/office/drawing/2014/main" id="{114CC880-579B-4688-A142-43DCE6BBBE03}"/>
+                <a16:creationId xmlns:a16="http://schemas.microsoft.com/office/drawing/2014/main" id="{0D3ADF8C-9176-493D-A486-B169E9D6C7BE}"/>
               </a:ext>
             </a:extLst>
           </p:cNvPr>
@@ -13241,7 +13264,7 @@
           <p:cNvPr id="8" name="">
             <a:extLst xmlns:a="http://schemas.openxmlformats.org/drawingml/2006/main">
               <a:ext uri="{FF2B5EF4-FFF2-40B4-BE49-F238E27FC236}">
-                <a16:creationId xmlns:a16="http://schemas.microsoft.com/office/drawing/2014/main" id="{8D9188A2-0340-43B0-B8B0-A0DAC59BE3F9}"/>
+                <a16:creationId xmlns:a16="http://schemas.microsoft.com/office/drawing/2014/main" id="{CDA8973B-D82A-404F-B6FE-F04354DFBD9A}"/>
               </a:ext>
             </a:extLst>
           </p:cNvPr>
@@ -13274,7 +13297,7 @@
           <p:cNvPr id="9" name="">
             <a:extLst xmlns:a="http://schemas.openxmlformats.org/drawingml/2006/main">
               <a:ext uri="{FF2B5EF4-FFF2-40B4-BE49-F238E27FC236}">
-                <a16:creationId xmlns:a16="http://schemas.microsoft.com/office/drawing/2014/main" id="{43FE8750-3B6C-4485-A09F-E4442DFCCDB3}"/>
+                <a16:creationId xmlns:a16="http://schemas.microsoft.com/office/drawing/2014/main" id="{2362A979-B103-4041-879D-A06F7590CB5A}"/>
               </a:ext>
             </a:extLst>
           </p:cNvPr>
@@ -13307,7 +13330,7 @@
           <p:cNvPr id="10" name="">
             <a:extLst xmlns:a="http://schemas.openxmlformats.org/drawingml/2006/main">
               <a:ext uri="{FF2B5EF4-FFF2-40B4-BE49-F238E27FC236}">
-                <a16:creationId xmlns:a16="http://schemas.microsoft.com/office/drawing/2014/main" id="{46C4F75D-1B0B-497A-A91E-C21DCB1D661F}"/>
+                <a16:creationId xmlns:a16="http://schemas.microsoft.com/office/drawing/2014/main" id="{840BA7B3-9F32-4A6D-A441-145FA93D876E}"/>
               </a:ext>
             </a:extLst>
           </p:cNvPr>
@@ -13340,7 +13363,7 @@
           <p:cNvPr id="11" name="">
             <a:extLst xmlns:a="http://schemas.openxmlformats.org/drawingml/2006/main">
               <a:ext uri="{FF2B5EF4-FFF2-40B4-BE49-F238E27FC236}">
-                <a16:creationId xmlns:a16="http://schemas.microsoft.com/office/drawing/2014/main" id="{8800DC85-E8D1-49F1-B425-B3B191FE109B}"/>
+                <a16:creationId xmlns:a16="http://schemas.microsoft.com/office/drawing/2014/main" id="{BE4FE36D-A253-4A99-8B78-796E5AA304E4}"/>
               </a:ext>
             </a:extLst>
           </p:cNvPr>
@@ -13404,7 +13427,7 @@
           <p:cNvPr id="12" name="">
             <a:extLst xmlns:a="http://schemas.openxmlformats.org/drawingml/2006/main">
               <a:ext uri="{FF2B5EF4-FFF2-40B4-BE49-F238E27FC236}">
-                <a16:creationId xmlns:a16="http://schemas.microsoft.com/office/drawing/2014/main" id="{3E8715B8-D392-49BA-9427-F0C23FB05ACB}"/>
+                <a16:creationId xmlns:a16="http://schemas.microsoft.com/office/drawing/2014/main" id="{C66F0C61-B02E-4565-85F4-6C8F441E4F8C}"/>
               </a:ext>
             </a:extLst>
           </p:cNvPr>
@@ -13437,7 +13460,7 @@
           <p:cNvPr id="13" name="">
             <a:extLst xmlns:a="http://schemas.openxmlformats.org/drawingml/2006/main">
               <a:ext uri="{FF2B5EF4-FFF2-40B4-BE49-F238E27FC236}">
-                <a16:creationId xmlns:a16="http://schemas.microsoft.com/office/drawing/2014/main" id="{52D425E3-F529-402E-84EA-28BF4484D682}"/>
+                <a16:creationId xmlns:a16="http://schemas.microsoft.com/office/drawing/2014/main" id="{CFEFC7A0-6DF9-45E9-A401-C941943500C5}"/>
               </a:ext>
             </a:extLst>
           </p:cNvPr>
@@ -13501,7 +13524,7 @@
           <p:cNvPr id="14" name="">
             <a:extLst xmlns:a="http://schemas.openxmlformats.org/drawingml/2006/main">
               <a:ext uri="{FF2B5EF4-FFF2-40B4-BE49-F238E27FC236}">
-                <a16:creationId xmlns:a16="http://schemas.microsoft.com/office/drawing/2014/main" id="{84224DD2-22BF-4658-8E97-A6E497D53139}"/>
+                <a16:creationId xmlns:a16="http://schemas.microsoft.com/office/drawing/2014/main" id="{1E5BCA49-C0FD-43F8-9F6A-D87899445EBF}"/>
               </a:ext>
             </a:extLst>
           </p:cNvPr>
@@ -13534,7 +13557,7 @@
           <p:cNvPr id="15" name="">
             <a:extLst xmlns:a="http://schemas.openxmlformats.org/drawingml/2006/main">
               <a:ext uri="{FF2B5EF4-FFF2-40B4-BE49-F238E27FC236}">
-                <a16:creationId xmlns:a16="http://schemas.microsoft.com/office/drawing/2014/main" id="{00ADD890-FA72-4ECD-8B98-5FEDB6699A82}"/>
+                <a16:creationId xmlns:a16="http://schemas.microsoft.com/office/drawing/2014/main" id="{D372E171-DF22-4BD1-9104-157ACF503D87}"/>
               </a:ext>
             </a:extLst>
           </p:cNvPr>
@@ -13598,7 +13621,7 @@
           <p:cNvPr id="16" name="">
             <a:extLst xmlns:a="http://schemas.openxmlformats.org/drawingml/2006/main">
               <a:ext uri="{FF2B5EF4-FFF2-40B4-BE49-F238E27FC236}">
-                <a16:creationId xmlns:a16="http://schemas.microsoft.com/office/drawing/2014/main" id="{78FD1E45-C0ED-4F11-BAB9-3DEFE99DA445}"/>
+                <a16:creationId xmlns:a16="http://schemas.microsoft.com/office/drawing/2014/main" id="{1750EA51-711F-4DE4-B70F-7BB006449CC2}"/>
               </a:ext>
             </a:extLst>
           </p:cNvPr>
@@ -13662,7 +13685,7 @@
           <p:cNvPr id="17" name="">
             <a:extLst xmlns:a="http://schemas.openxmlformats.org/drawingml/2006/main">
               <a:ext uri="{FF2B5EF4-FFF2-40B4-BE49-F238E27FC236}">
-                <a16:creationId xmlns:a16="http://schemas.microsoft.com/office/drawing/2014/main" id="{5EE58EC4-D433-40E4-9D3F-EB216231BADD}"/>
+                <a16:creationId xmlns:a16="http://schemas.microsoft.com/office/drawing/2014/main" id="{0220CE29-BF66-4345-8E5B-02ECE735D158}"/>
               </a:ext>
             </a:extLst>
           </p:cNvPr>
@@ -13722,7 +13745,7 @@
           <p:cNvPr id="18" name="">
             <a:extLst xmlns:a="http://schemas.openxmlformats.org/drawingml/2006/main">
               <a:ext uri="{FF2B5EF4-FFF2-40B4-BE49-F238E27FC236}">
-                <a16:creationId xmlns:a16="http://schemas.microsoft.com/office/drawing/2014/main" id="{012EA6EB-C3E9-46D1-BAD3-D3DA64993214}"/>
+                <a16:creationId xmlns:a16="http://schemas.microsoft.com/office/drawing/2014/main" id="{4BCD0B2B-BFAC-44A2-8D0B-61F283EF754F}"/>
               </a:ext>
             </a:extLst>
           </p:cNvPr>
@@ -13782,7 +13805,7 @@
           <p:cNvPr id="19" name="">
             <a:extLst xmlns:a="http://schemas.openxmlformats.org/drawingml/2006/main">
               <a:ext uri="{FF2B5EF4-FFF2-40B4-BE49-F238E27FC236}">
-                <a16:creationId xmlns:a16="http://schemas.microsoft.com/office/drawing/2014/main" id="{588DC925-3382-4AFA-B5E3-AF82F3ED0FE6}"/>
+                <a16:creationId xmlns:a16="http://schemas.microsoft.com/office/drawing/2014/main" id="{336C197C-919C-457F-80D7-D3599EA49695}"/>
               </a:ext>
             </a:extLst>
           </p:cNvPr>
@@ -13842,7 +13865,7 @@
           <p:cNvPr id="20" name="">
             <a:extLst xmlns:a="http://schemas.openxmlformats.org/drawingml/2006/main">
               <a:ext uri="{FF2B5EF4-FFF2-40B4-BE49-F238E27FC236}">
-                <a16:creationId xmlns:a16="http://schemas.microsoft.com/office/drawing/2014/main" id="{53BE7B5F-288D-44D5-93A7-D4A89DC2282A}"/>
+                <a16:creationId xmlns:a16="http://schemas.microsoft.com/office/drawing/2014/main" id="{BC3F285F-BB54-40A7-809A-1FB2558C047C}"/>
               </a:ext>
             </a:extLst>
           </p:cNvPr>
@@ -13902,7 +13925,7 @@
           <p:cNvPr id="21" name="">
             <a:extLst xmlns:a="http://schemas.openxmlformats.org/drawingml/2006/main">
               <a:ext uri="{FF2B5EF4-FFF2-40B4-BE49-F238E27FC236}">
-                <a16:creationId xmlns:a16="http://schemas.microsoft.com/office/drawing/2014/main" id="{332C742F-C31B-489D-8271-ED4BA1CB130C}"/>
+                <a16:creationId xmlns:a16="http://schemas.microsoft.com/office/drawing/2014/main" id="{7F125455-DA77-4FA4-A1E5-CC28A9CF90F2}"/>
               </a:ext>
             </a:extLst>
           </p:cNvPr>
@@ -13962,7 +13985,7 @@
           <p:cNvPr id="22" name="">
             <a:extLst xmlns:a="http://schemas.openxmlformats.org/drawingml/2006/main">
               <a:ext uri="{FF2B5EF4-FFF2-40B4-BE49-F238E27FC236}">
-                <a16:creationId xmlns:a16="http://schemas.microsoft.com/office/drawing/2014/main" id="{B6111B31-326E-4F8C-B8E7-A10F5D2C277F}"/>
+                <a16:creationId xmlns:a16="http://schemas.microsoft.com/office/drawing/2014/main" id="{A1B09B88-0CD1-4198-8F62-DFCDD1E16561}"/>
               </a:ext>
             </a:extLst>
           </p:cNvPr>
@@ -14022,7 +14045,7 @@
           <p:cNvPr id="23" name="">
             <a:extLst xmlns:a="http://schemas.openxmlformats.org/drawingml/2006/main">
               <a:ext uri="{FF2B5EF4-FFF2-40B4-BE49-F238E27FC236}">
-                <a16:creationId xmlns:a16="http://schemas.microsoft.com/office/drawing/2014/main" id="{559242C1-4D35-4495-9A86-2C47B1D4977B}"/>
+                <a16:creationId xmlns:a16="http://schemas.microsoft.com/office/drawing/2014/main" id="{46F9C18A-88D3-4A61-BC3D-F111A4B3BA53}"/>
               </a:ext>
             </a:extLst>
           </p:cNvPr>
@@ -14082,7 +14105,7 @@
           <p:cNvPr id="24" name="">
             <a:extLst xmlns:a="http://schemas.openxmlformats.org/drawingml/2006/main">
               <a:ext uri="{FF2B5EF4-FFF2-40B4-BE49-F238E27FC236}">
-                <a16:creationId xmlns:a16="http://schemas.microsoft.com/office/drawing/2014/main" id="{1AB33820-48F6-4A16-AA55-15244C5FD3F9}"/>
+                <a16:creationId xmlns:a16="http://schemas.microsoft.com/office/drawing/2014/main" id="{D4CFB6C4-6675-4743-893C-33133F0AC246}"/>
               </a:ext>
             </a:extLst>
           </p:cNvPr>
@@ -14115,7 +14138,7 @@
           <p:cNvPr id="25" name="">
             <a:extLst xmlns:a="http://schemas.openxmlformats.org/drawingml/2006/main">
               <a:ext uri="{FF2B5EF4-FFF2-40B4-BE49-F238E27FC236}">
-                <a16:creationId xmlns:a16="http://schemas.microsoft.com/office/drawing/2014/main" id="{2072C069-42F9-4B3F-B070-DE4C98A373D0}"/>
+                <a16:creationId xmlns:a16="http://schemas.microsoft.com/office/drawing/2014/main" id="{A296142F-0C9B-4469-83E6-E1B6C65A34B9}"/>
               </a:ext>
             </a:extLst>
           </p:cNvPr>
@@ -14179,7 +14202,7 @@
           <p:cNvPr id="26" name="">
             <a:extLst xmlns:a="http://schemas.openxmlformats.org/drawingml/2006/main">
               <a:ext uri="{FF2B5EF4-FFF2-40B4-BE49-F238E27FC236}">
-                <a16:creationId xmlns:a16="http://schemas.microsoft.com/office/drawing/2014/main" id="{D7D13087-4E82-4A93-B254-A7536E016BFF}"/>
+                <a16:creationId xmlns:a16="http://schemas.microsoft.com/office/drawing/2014/main" id="{6E86C409-206F-4C4F-95B5-ADE24E471A27}"/>
               </a:ext>
             </a:extLst>
           </p:cNvPr>
@@ -14212,7 +14235,7 @@
           <p:cNvPr id="27" name="">
             <a:extLst xmlns:a="http://schemas.openxmlformats.org/drawingml/2006/main">
               <a:ext uri="{FF2B5EF4-FFF2-40B4-BE49-F238E27FC236}">
-                <a16:creationId xmlns:a16="http://schemas.microsoft.com/office/drawing/2014/main" id="{B5DBF67F-DF7B-47C6-A125-29E612C48B5C}"/>
+                <a16:creationId xmlns:a16="http://schemas.microsoft.com/office/drawing/2014/main" id="{D92138BB-79EB-418E-8FBF-8F199320E554}"/>
               </a:ext>
             </a:extLst>
           </p:cNvPr>
@@ -14276,7 +14299,7 @@
           <p:cNvPr id="28" name="">
             <a:extLst xmlns:a="http://schemas.openxmlformats.org/drawingml/2006/main">
               <a:ext uri="{FF2B5EF4-FFF2-40B4-BE49-F238E27FC236}">
-                <a16:creationId xmlns:a16="http://schemas.microsoft.com/office/drawing/2014/main" id="{B0C05551-D9C1-4F83-AA77-ECD011B791F0}"/>
+                <a16:creationId xmlns:a16="http://schemas.microsoft.com/office/drawing/2014/main" id="{D293E177-90F1-49AB-BA86-ABA304361C48}"/>
               </a:ext>
             </a:extLst>
           </p:cNvPr>
@@ -14309,7 +14332,7 @@
           <p:cNvPr id="29" name="">
             <a:extLst xmlns:a="http://schemas.openxmlformats.org/drawingml/2006/main">
               <a:ext uri="{FF2B5EF4-FFF2-40B4-BE49-F238E27FC236}">
-                <a16:creationId xmlns:a16="http://schemas.microsoft.com/office/drawing/2014/main" id="{B8977587-D77F-4C07-9997-6A60E47F9708}"/>
+                <a16:creationId xmlns:a16="http://schemas.microsoft.com/office/drawing/2014/main" id="{8B721469-CCDB-4936-A637-FB83780CACD7}"/>
               </a:ext>
             </a:extLst>
           </p:cNvPr>
@@ -14373,7 +14396,7 @@
           <p:cNvPr id="30" name="">
             <a:extLst xmlns:a="http://schemas.openxmlformats.org/drawingml/2006/main">
               <a:ext uri="{FF2B5EF4-FFF2-40B4-BE49-F238E27FC236}">
-                <a16:creationId xmlns:a16="http://schemas.microsoft.com/office/drawing/2014/main" id="{0A41711F-6E01-4740-9180-A10132CF5C76}"/>
+                <a16:creationId xmlns:a16="http://schemas.microsoft.com/office/drawing/2014/main" id="{81AD51A6-5EC3-4909-A6B2-FC0B2AF238E2}"/>
               </a:ext>
             </a:extLst>
           </p:cNvPr>
@@ -14406,7 +14429,7 @@
           <p:cNvPr id="31" name="">
             <a:extLst xmlns:a="http://schemas.openxmlformats.org/drawingml/2006/main">
               <a:ext uri="{FF2B5EF4-FFF2-40B4-BE49-F238E27FC236}">
-                <a16:creationId xmlns:a16="http://schemas.microsoft.com/office/drawing/2014/main" id="{38757AB0-B5F8-48A3-B674-6C5494D245C9}"/>
+                <a16:creationId xmlns:a16="http://schemas.microsoft.com/office/drawing/2014/main" id="{2E1D3A33-477B-43D0-90FF-4DECD572C838}"/>
               </a:ext>
             </a:extLst>
           </p:cNvPr>
@@ -14470,7 +14493,7 @@
           <p:cNvPr id="32" name="">
             <a:extLst xmlns:a="http://schemas.openxmlformats.org/drawingml/2006/main">
               <a:ext uri="{FF2B5EF4-FFF2-40B4-BE49-F238E27FC236}">
-                <a16:creationId xmlns:a16="http://schemas.microsoft.com/office/drawing/2014/main" id="{A8B4517F-FC3C-4692-8B6E-47B017ADC2F0}"/>
+                <a16:creationId xmlns:a16="http://schemas.microsoft.com/office/drawing/2014/main" id="{181BC2CD-80E1-48C2-BEF1-E515B1C73FB8}"/>
               </a:ext>
             </a:extLst>
           </p:cNvPr>
@@ -14534,7 +14557,7 @@
           <p:cNvPr id="33" name="">
             <a:extLst xmlns:a="http://schemas.openxmlformats.org/drawingml/2006/main">
               <a:ext uri="{FF2B5EF4-FFF2-40B4-BE49-F238E27FC236}">
-                <a16:creationId xmlns:a16="http://schemas.microsoft.com/office/drawing/2014/main" id="{4C2656B7-BC10-4C85-B9AA-D0B5C8A54970}"/>
+                <a16:creationId xmlns:a16="http://schemas.microsoft.com/office/drawing/2014/main" id="{331C21E7-916A-4BD1-A47F-5A37D71A6444}"/>
               </a:ext>
             </a:extLst>
           </p:cNvPr>
@@ -14567,7 +14590,7 @@
           <p:cNvPr id="34" name="">
             <a:extLst xmlns:a="http://schemas.openxmlformats.org/drawingml/2006/main">
               <a:ext uri="{FF2B5EF4-FFF2-40B4-BE49-F238E27FC236}">
-                <a16:creationId xmlns:a16="http://schemas.microsoft.com/office/drawing/2014/main" id="{AFA98547-F78B-489E-9E7C-4670FF323705}"/>
+                <a16:creationId xmlns:a16="http://schemas.microsoft.com/office/drawing/2014/main" id="{462B6DA3-1C1C-478E-86C3-0DD0E4EF4E5A}"/>
               </a:ext>
             </a:extLst>
           </p:cNvPr>
@@ -14631,7 +14654,7 @@
           <p:cNvPr id="35" name="">
             <a:extLst xmlns:a="http://schemas.openxmlformats.org/drawingml/2006/main">
               <a:ext uri="{FF2B5EF4-FFF2-40B4-BE49-F238E27FC236}">
-                <a16:creationId xmlns:a16="http://schemas.microsoft.com/office/drawing/2014/main" id="{98B484D5-DE4B-4F39-9667-1B808115526C}"/>
+                <a16:creationId xmlns:a16="http://schemas.microsoft.com/office/drawing/2014/main" id="{67600531-5D89-42BB-A41C-CEBF36C98D2E}"/>
               </a:ext>
             </a:extLst>
           </p:cNvPr>
@@ -14664,7 +14687,7 @@
           <p:cNvPr id="36" name="">
             <a:extLst xmlns:a="http://schemas.openxmlformats.org/drawingml/2006/main">
               <a:ext uri="{FF2B5EF4-FFF2-40B4-BE49-F238E27FC236}">
-                <a16:creationId xmlns:a16="http://schemas.microsoft.com/office/drawing/2014/main" id="{4200DDC8-E829-455F-98DA-B769A87F1C57}"/>
+                <a16:creationId xmlns:a16="http://schemas.microsoft.com/office/drawing/2014/main" id="{07C47163-8B82-48A5-A8AD-6FAB1FC47ED1}"/>
               </a:ext>
             </a:extLst>
           </p:cNvPr>
@@ -14728,7 +14751,7 @@
           <p:cNvPr id="37" name="">
             <a:extLst xmlns:a="http://schemas.openxmlformats.org/drawingml/2006/main">
               <a:ext uri="{FF2B5EF4-FFF2-40B4-BE49-F238E27FC236}">
-                <a16:creationId xmlns:a16="http://schemas.microsoft.com/office/drawing/2014/main" id="{52A108C8-97DF-48C3-A965-9630AC6936B5}"/>
+                <a16:creationId xmlns:a16="http://schemas.microsoft.com/office/drawing/2014/main" id="{D74AF174-3846-403A-84E5-457D996E577B}"/>
               </a:ext>
             </a:extLst>
           </p:cNvPr>
@@ -14790,7 +14813,7 @@
     </p:spTree>
     <p:extLst>
       <p:ext uri="{BB962C8B-B14F-4D97-AF65-F5344CB8AC3E}">
-        <p14:creationId xmlns:p14="http://schemas.microsoft.com/office/powerpoint/2010/main" val="168166094"/>
+        <p14:creationId xmlns:p14="http://schemas.microsoft.com/office/powerpoint/2010/main" val="977596259"/>
       </p:ext>
     </p:extLst>
   </p:cSld>
@@ -14814,7 +14837,7 @@
           <p:cNvPr id="1" name="">
             <a:extLst xmlns:a="http://schemas.openxmlformats.org/drawingml/2006/main">
               <a:ext uri="{FF2B5EF4-FFF2-40B4-BE49-F238E27FC236}">
-                <a16:creationId xmlns:a16="http://schemas.microsoft.com/office/drawing/2014/main" id="{663D3971-3CC6-4C09-97FA-A8CD29F64F61}"/>
+                <a16:creationId xmlns:a16="http://schemas.microsoft.com/office/drawing/2014/main" id="{7B58BC85-99D7-44ED-9B9F-82E0E13D8AA2}"/>
               </a:ext>
             </a:extLst>
           </p:cNvPr>
@@ -14849,7 +14872,7 @@
           <p:cNvPr id="2" name="">
             <a:extLst xmlns:a="http://schemas.openxmlformats.org/drawingml/2006/main">
               <a:ext uri="{FF2B5EF4-FFF2-40B4-BE49-F238E27FC236}">
-                <a16:creationId xmlns:a16="http://schemas.microsoft.com/office/drawing/2014/main" id="{EF828106-ADBE-4F6F-90BB-473FD61910F8}"/>
+                <a16:creationId xmlns:a16="http://schemas.microsoft.com/office/drawing/2014/main" id="{2792DAEE-231F-4570-A1D0-BAEDF5852F4C}"/>
               </a:ext>
             </a:extLst>
           </p:cNvPr>
@@ -14913,7 +14936,7 @@
           <p:cNvPr id="3" name="">
             <a:extLst xmlns:a="http://schemas.openxmlformats.org/drawingml/2006/main">
               <a:ext uri="{FF2B5EF4-FFF2-40B4-BE49-F238E27FC236}">
-                <a16:creationId xmlns:a16="http://schemas.microsoft.com/office/drawing/2014/main" id="{32338288-0169-43A6-9A11-BD919A082FF4}"/>
+                <a16:creationId xmlns:a16="http://schemas.microsoft.com/office/drawing/2014/main" id="{72DD8402-1304-4CDE-A034-C01E8D595651}"/>
               </a:ext>
             </a:extLst>
           </p:cNvPr>
@@ -14977,7 +15000,7 @@
           <p:cNvPr id="4" name="">
             <a:extLst xmlns:a="http://schemas.openxmlformats.org/drawingml/2006/main">
               <a:ext uri="{FF2B5EF4-FFF2-40B4-BE49-F238E27FC236}">
-                <a16:creationId xmlns:a16="http://schemas.microsoft.com/office/drawing/2014/main" id="{4AEA0524-EE67-41D5-8D18-C1497E3C1C52}"/>
+                <a16:creationId xmlns:a16="http://schemas.microsoft.com/office/drawing/2014/main" id="{E108D639-2DC1-4C02-91EF-E8F238BE9623}"/>
               </a:ext>
             </a:extLst>
           </p:cNvPr>
@@ -15041,7 +15064,7 @@
           <p:cNvPr id="5" name="">
             <a:extLst xmlns:a="http://schemas.openxmlformats.org/drawingml/2006/main">
               <a:ext uri="{FF2B5EF4-FFF2-40B4-BE49-F238E27FC236}">
-                <a16:creationId xmlns:a16="http://schemas.microsoft.com/office/drawing/2014/main" id="{56442042-C43E-4EB4-A81B-9B3FA5A3D276}"/>
+                <a16:creationId xmlns:a16="http://schemas.microsoft.com/office/drawing/2014/main" id="{5C73B245-19AE-4BAA-8DE9-DD600E9EC182}"/>
               </a:ext>
             </a:extLst>
           </p:cNvPr>
@@ -15074,7 +15097,7 @@
           <p:cNvPr id="6" name="">
             <a:extLst xmlns:a="http://schemas.openxmlformats.org/drawingml/2006/main">
               <a:ext uri="{FF2B5EF4-FFF2-40B4-BE49-F238E27FC236}">
-                <a16:creationId xmlns:a16="http://schemas.microsoft.com/office/drawing/2014/main" id="{1597F810-D983-4F05-A865-923FBAD4006A}"/>
+                <a16:creationId xmlns:a16="http://schemas.microsoft.com/office/drawing/2014/main" id="{B36B75E0-3A7C-4A9C-AFBF-8CD2AA1AB085}"/>
               </a:ext>
             </a:extLst>
           </p:cNvPr>
@@ -15107,7 +15130,7 @@
           <p:cNvPr id="7" name="">
             <a:extLst xmlns:a="http://schemas.openxmlformats.org/drawingml/2006/main">
               <a:ext uri="{FF2B5EF4-FFF2-40B4-BE49-F238E27FC236}">
-                <a16:creationId xmlns:a16="http://schemas.microsoft.com/office/drawing/2014/main" id="{D374ECA4-A73E-4960-9D16-ED92AB8F7BEB}"/>
+                <a16:creationId xmlns:a16="http://schemas.microsoft.com/office/drawing/2014/main" id="{1127A2B8-F353-4F03-9504-2F37E6A27389}"/>
               </a:ext>
             </a:extLst>
           </p:cNvPr>
@@ -15171,7 +15194,7 @@
           <p:cNvPr id="8" name="">
             <a:extLst xmlns:a="http://schemas.openxmlformats.org/drawingml/2006/main">
               <a:ext uri="{FF2B5EF4-FFF2-40B4-BE49-F238E27FC236}">
-                <a16:creationId xmlns:a16="http://schemas.microsoft.com/office/drawing/2014/main" id="{58E149A1-149C-408E-B57B-92A1DE933BB9}"/>
+                <a16:creationId xmlns:a16="http://schemas.microsoft.com/office/drawing/2014/main" id="{AE99D088-E0E2-4F54-8DFD-720DF0B31C2F}"/>
               </a:ext>
             </a:extLst>
           </p:cNvPr>
@@ -15204,7 +15227,7 @@
           <p:cNvPr id="9" name="">
             <a:extLst xmlns:a="http://schemas.openxmlformats.org/drawingml/2006/main">
               <a:ext uri="{FF2B5EF4-FFF2-40B4-BE49-F238E27FC236}">
-                <a16:creationId xmlns:a16="http://schemas.microsoft.com/office/drawing/2014/main" id="{E87511F1-FDFD-430F-8BB1-F069D55B726A}"/>
+                <a16:creationId xmlns:a16="http://schemas.microsoft.com/office/drawing/2014/main" id="{06A82B34-99B4-4FF8-BC77-1BB5E01FD342}"/>
               </a:ext>
             </a:extLst>
           </p:cNvPr>
@@ -15268,7 +15291,7 @@
           <p:cNvPr id="10" name="">
             <a:extLst xmlns:a="http://schemas.openxmlformats.org/drawingml/2006/main">
               <a:ext uri="{FF2B5EF4-FFF2-40B4-BE49-F238E27FC236}">
-                <a16:creationId xmlns:a16="http://schemas.microsoft.com/office/drawing/2014/main" id="{5F0C194A-7E54-4D73-A9D4-BF767D17BCAB}"/>
+                <a16:creationId xmlns:a16="http://schemas.microsoft.com/office/drawing/2014/main" id="{BED505EE-A62C-4FDE-B270-046CF5C2B0AB}"/>
               </a:ext>
             </a:extLst>
           </p:cNvPr>
@@ -15301,7 +15324,7 @@
           <p:cNvPr id="11" name="">
             <a:extLst xmlns:a="http://schemas.openxmlformats.org/drawingml/2006/main">
               <a:ext uri="{FF2B5EF4-FFF2-40B4-BE49-F238E27FC236}">
-                <a16:creationId xmlns:a16="http://schemas.microsoft.com/office/drawing/2014/main" id="{1E892EB4-604E-47B1-8973-465FD3C53485}"/>
+                <a16:creationId xmlns:a16="http://schemas.microsoft.com/office/drawing/2014/main" id="{F6E5D268-E0BF-4188-9166-604E987D34F9}"/>
               </a:ext>
             </a:extLst>
           </p:cNvPr>
@@ -15365,7 +15388,7 @@
           <p:cNvPr id="12" name="">
             <a:extLst xmlns:a="http://schemas.openxmlformats.org/drawingml/2006/main">
               <a:ext uri="{FF2B5EF4-FFF2-40B4-BE49-F238E27FC236}">
-                <a16:creationId xmlns:a16="http://schemas.microsoft.com/office/drawing/2014/main" id="{D2AF1481-E4AC-448B-A26B-5EC993D96060}"/>
+                <a16:creationId xmlns:a16="http://schemas.microsoft.com/office/drawing/2014/main" id="{A6731411-2EE4-4F64-9FAA-8153889D7094}"/>
               </a:ext>
             </a:extLst>
           </p:cNvPr>
@@ -15398,7 +15421,7 @@
           <p:cNvPr id="13" name="">
             <a:extLst xmlns:a="http://schemas.openxmlformats.org/drawingml/2006/main">
               <a:ext uri="{FF2B5EF4-FFF2-40B4-BE49-F238E27FC236}">
-                <a16:creationId xmlns:a16="http://schemas.microsoft.com/office/drawing/2014/main" id="{84DD04C6-A092-460F-9EB7-BAC17E6E758D}"/>
+                <a16:creationId xmlns:a16="http://schemas.microsoft.com/office/drawing/2014/main" id="{64F31A3B-7926-43FD-908A-3288773334E5}"/>
               </a:ext>
             </a:extLst>
           </p:cNvPr>
@@ -15462,7 +15485,7 @@
           <p:cNvPr id="14" name="">
             <a:extLst xmlns:a="http://schemas.openxmlformats.org/drawingml/2006/main">
               <a:ext uri="{FF2B5EF4-FFF2-40B4-BE49-F238E27FC236}">
-                <a16:creationId xmlns:a16="http://schemas.microsoft.com/office/drawing/2014/main" id="{2E9A0AAA-2377-488F-84CE-FF89F60ABB7C}"/>
+                <a16:creationId xmlns:a16="http://schemas.microsoft.com/office/drawing/2014/main" id="{C199457E-DA32-4927-9D53-7EBBFBD61D39}"/>
               </a:ext>
             </a:extLst>
           </p:cNvPr>
@@ -15495,7 +15518,7 @@
           <p:cNvPr id="15" name="">
             <a:extLst xmlns:a="http://schemas.openxmlformats.org/drawingml/2006/main">
               <a:ext uri="{FF2B5EF4-FFF2-40B4-BE49-F238E27FC236}">
-                <a16:creationId xmlns:a16="http://schemas.microsoft.com/office/drawing/2014/main" id="{33DC2040-0530-49C3-9E97-7E1D9B02B095}"/>
+                <a16:creationId xmlns:a16="http://schemas.microsoft.com/office/drawing/2014/main" id="{FC6C2D9E-397F-49D1-8A51-48875622682C}"/>
               </a:ext>
             </a:extLst>
           </p:cNvPr>
@@ -15559,7 +15582,7 @@
           <p:cNvPr id="16" name="">
             <a:extLst xmlns:a="http://schemas.openxmlformats.org/drawingml/2006/main">
               <a:ext uri="{FF2B5EF4-FFF2-40B4-BE49-F238E27FC236}">
-                <a16:creationId xmlns:a16="http://schemas.microsoft.com/office/drawing/2014/main" id="{DB07EA3F-9D21-41E2-8DFE-2E8A4874C97A}"/>
+                <a16:creationId xmlns:a16="http://schemas.microsoft.com/office/drawing/2014/main" id="{DDD73770-708D-4256-8FC5-C00A1567FC35}"/>
               </a:ext>
             </a:extLst>
           </p:cNvPr>
@@ -15592,7 +15615,7 @@
           <p:cNvPr id="17" name="">
             <a:extLst xmlns:a="http://schemas.openxmlformats.org/drawingml/2006/main">
               <a:ext uri="{FF2B5EF4-FFF2-40B4-BE49-F238E27FC236}">
-                <a16:creationId xmlns:a16="http://schemas.microsoft.com/office/drawing/2014/main" id="{E7744002-F84E-41E5-8F97-80C5AF42D40B}"/>
+                <a16:creationId xmlns:a16="http://schemas.microsoft.com/office/drawing/2014/main" id="{F91295F3-2DCA-45F6-A1A6-D5CB0969A36E}"/>
               </a:ext>
             </a:extLst>
           </p:cNvPr>
@@ -15656,7 +15679,7 @@
           <p:cNvPr id="18" name="">
             <a:extLst xmlns:a="http://schemas.openxmlformats.org/drawingml/2006/main">
               <a:ext uri="{FF2B5EF4-FFF2-40B4-BE49-F238E27FC236}">
-                <a16:creationId xmlns:a16="http://schemas.microsoft.com/office/drawing/2014/main" id="{35C406D5-AD24-43CE-9862-D0866855BCAB}"/>
+                <a16:creationId xmlns:a16="http://schemas.microsoft.com/office/drawing/2014/main" id="{C54B7D6F-5ACC-4ED4-A753-E7F7E5010DA6}"/>
               </a:ext>
             </a:extLst>
           </p:cNvPr>
@@ -15689,7 +15712,7 @@
           <p:cNvPr id="19" name="">
             <a:extLst xmlns:a="http://schemas.openxmlformats.org/drawingml/2006/main">
               <a:ext uri="{FF2B5EF4-FFF2-40B4-BE49-F238E27FC236}">
-                <a16:creationId xmlns:a16="http://schemas.microsoft.com/office/drawing/2014/main" id="{65F88D31-D105-42AF-8D0B-73184A64C091}"/>
+                <a16:creationId xmlns:a16="http://schemas.microsoft.com/office/drawing/2014/main" id="{866B7070-D2FC-432D-99DC-84563454BCCC}"/>
               </a:ext>
             </a:extLst>
           </p:cNvPr>
@@ -15753,7 +15776,7 @@
           <p:cNvPr id="20" name="">
             <a:extLst xmlns:a="http://schemas.openxmlformats.org/drawingml/2006/main">
               <a:ext uri="{FF2B5EF4-FFF2-40B4-BE49-F238E27FC236}">
-                <a16:creationId xmlns:a16="http://schemas.microsoft.com/office/drawing/2014/main" id="{2D4EBB1F-7DE4-44EE-8782-2FFAA7FC5AA1}"/>
+                <a16:creationId xmlns:a16="http://schemas.microsoft.com/office/drawing/2014/main" id="{67D331D4-65E3-4338-BB80-8C29DAB10A72}"/>
               </a:ext>
             </a:extLst>
           </p:cNvPr>
@@ -15786,7 +15809,7 @@
           <p:cNvPr id="21" name="">
             <a:extLst xmlns:a="http://schemas.openxmlformats.org/drawingml/2006/main">
               <a:ext uri="{FF2B5EF4-FFF2-40B4-BE49-F238E27FC236}">
-                <a16:creationId xmlns:a16="http://schemas.microsoft.com/office/drawing/2014/main" id="{5435033F-EF66-43B2-B874-B45A0ABF4487}"/>
+                <a16:creationId xmlns:a16="http://schemas.microsoft.com/office/drawing/2014/main" id="{D8D3D118-ACE3-4A83-9374-3098D4743F42}"/>
               </a:ext>
             </a:extLst>
           </p:cNvPr>
@@ -15850,7 +15873,7 @@
           <p:cNvPr id="22" name="">
             <a:extLst xmlns:a="http://schemas.openxmlformats.org/drawingml/2006/main">
               <a:ext uri="{FF2B5EF4-FFF2-40B4-BE49-F238E27FC236}">
-                <a16:creationId xmlns:a16="http://schemas.microsoft.com/office/drawing/2014/main" id="{1ED966BB-63BD-4B42-BE44-917C61D5E5C7}"/>
+                <a16:creationId xmlns:a16="http://schemas.microsoft.com/office/drawing/2014/main" id="{B9044F0A-9A88-4650-A369-1F3D933578C9}"/>
               </a:ext>
             </a:extLst>
           </p:cNvPr>
@@ -15883,7 +15906,7 @@
           <p:cNvPr id="23" name="">
             <a:extLst xmlns:a="http://schemas.openxmlformats.org/drawingml/2006/main">
               <a:ext uri="{FF2B5EF4-FFF2-40B4-BE49-F238E27FC236}">
-                <a16:creationId xmlns:a16="http://schemas.microsoft.com/office/drawing/2014/main" id="{CACE2A8D-78CC-4C38-9C9D-C0B5085DD544}"/>
+                <a16:creationId xmlns:a16="http://schemas.microsoft.com/office/drawing/2014/main" id="{45237551-0102-42ED-8920-6A4BC1578ADA}"/>
               </a:ext>
             </a:extLst>
           </p:cNvPr>
@@ -15947,7 +15970,7 @@
           <p:cNvPr id="24" name="">
             <a:extLst xmlns:a="http://schemas.openxmlformats.org/drawingml/2006/main">
               <a:ext uri="{FF2B5EF4-FFF2-40B4-BE49-F238E27FC236}">
-                <a16:creationId xmlns:a16="http://schemas.microsoft.com/office/drawing/2014/main" id="{435F9149-BF84-4823-8820-F39220F7C416}"/>
+                <a16:creationId xmlns:a16="http://schemas.microsoft.com/office/drawing/2014/main" id="{E32D48CC-B89F-4B8A-B145-DE6A2F5D41DE}"/>
               </a:ext>
             </a:extLst>
           </p:cNvPr>
@@ -15980,7 +16003,7 @@
           <p:cNvPr id="25" name="">
             <a:extLst xmlns:a="http://schemas.openxmlformats.org/drawingml/2006/main">
               <a:ext uri="{FF2B5EF4-FFF2-40B4-BE49-F238E27FC236}">
-                <a16:creationId xmlns:a16="http://schemas.microsoft.com/office/drawing/2014/main" id="{102932E8-889C-4595-9BE4-6B84FB2D3F56}"/>
+                <a16:creationId xmlns:a16="http://schemas.microsoft.com/office/drawing/2014/main" id="{608E4FB9-DD38-4A96-B7C1-25E7F0625072}"/>
               </a:ext>
             </a:extLst>
           </p:cNvPr>
@@ -16044,7 +16067,7 @@
           <p:cNvPr id="26" name="">
             <a:extLst xmlns:a="http://schemas.openxmlformats.org/drawingml/2006/main">
               <a:ext uri="{FF2B5EF4-FFF2-40B4-BE49-F238E27FC236}">
-                <a16:creationId xmlns:a16="http://schemas.microsoft.com/office/drawing/2014/main" id="{43C0C2EB-AF2F-4993-B94D-1CA8A5E013A5}"/>
+                <a16:creationId xmlns:a16="http://schemas.microsoft.com/office/drawing/2014/main" id="{D3D463A4-0EF1-4D50-915E-88168F845127}"/>
               </a:ext>
             </a:extLst>
           </p:cNvPr>
@@ -16077,7 +16100,7 @@
           <p:cNvPr id="27" name="">
             <a:extLst xmlns:a="http://schemas.openxmlformats.org/drawingml/2006/main">
               <a:ext uri="{FF2B5EF4-FFF2-40B4-BE49-F238E27FC236}">
-                <a16:creationId xmlns:a16="http://schemas.microsoft.com/office/drawing/2014/main" id="{B9A3525F-0359-494B-A6FF-A66DED02C306}"/>
+                <a16:creationId xmlns:a16="http://schemas.microsoft.com/office/drawing/2014/main" id="{04525725-D109-4170-8E12-3E0D0B6E0D9D}"/>
               </a:ext>
             </a:extLst>
           </p:cNvPr>
@@ -16141,7 +16164,7 @@
           <p:cNvPr id="28" name="">
             <a:extLst xmlns:a="http://schemas.openxmlformats.org/drawingml/2006/main">
               <a:ext uri="{FF2B5EF4-FFF2-40B4-BE49-F238E27FC236}">
-                <a16:creationId xmlns:a16="http://schemas.microsoft.com/office/drawing/2014/main" id="{C348F27A-807B-47C8-A6B7-95A99F9A1E6A}"/>
+                <a16:creationId xmlns:a16="http://schemas.microsoft.com/office/drawing/2014/main" id="{BBA89D62-F19F-4ED0-A098-7DD29C219E33}"/>
               </a:ext>
             </a:extLst>
           </p:cNvPr>
@@ -16174,7 +16197,7 @@
           <p:cNvPr id="29" name="">
             <a:extLst xmlns:a="http://schemas.openxmlformats.org/drawingml/2006/main">
               <a:ext uri="{FF2B5EF4-FFF2-40B4-BE49-F238E27FC236}">
-                <a16:creationId xmlns:a16="http://schemas.microsoft.com/office/drawing/2014/main" id="{6443D3D6-B365-4BBC-BA9C-B7A8288BE25F}"/>
+                <a16:creationId xmlns:a16="http://schemas.microsoft.com/office/drawing/2014/main" id="{89A1C3E0-1452-44E8-B247-C1BC8B74F444}"/>
               </a:ext>
             </a:extLst>
           </p:cNvPr>
@@ -16238,7 +16261,7 @@
           <p:cNvPr id="30" name="">
             <a:extLst xmlns:a="http://schemas.openxmlformats.org/drawingml/2006/main">
               <a:ext uri="{FF2B5EF4-FFF2-40B4-BE49-F238E27FC236}">
-                <a16:creationId xmlns:a16="http://schemas.microsoft.com/office/drawing/2014/main" id="{AE42162A-1A2A-4CD6-9F24-2D8B0BFF3B8A}"/>
+                <a16:creationId xmlns:a16="http://schemas.microsoft.com/office/drawing/2014/main" id="{0D74B3E3-5497-44D3-88CC-1A5268020130}"/>
               </a:ext>
             </a:extLst>
           </p:cNvPr>
@@ -16271,7 +16294,7 @@
           <p:cNvPr id="31" name="">
             <a:extLst xmlns:a="http://schemas.openxmlformats.org/drawingml/2006/main">
               <a:ext uri="{FF2B5EF4-FFF2-40B4-BE49-F238E27FC236}">
-                <a16:creationId xmlns:a16="http://schemas.microsoft.com/office/drawing/2014/main" id="{F55FF7C9-947E-49CC-B66A-0263FCC0674D}"/>
+                <a16:creationId xmlns:a16="http://schemas.microsoft.com/office/drawing/2014/main" id="{98436ED6-BDE3-49A2-9921-C44871EFFB95}"/>
               </a:ext>
             </a:extLst>
           </p:cNvPr>
@@ -16333,7 +16356,7 @@
     </p:spTree>
     <p:extLst>
       <p:ext uri="{BB962C8B-B14F-4D97-AF65-F5344CB8AC3E}">
-        <p14:creationId xmlns:p14="http://schemas.microsoft.com/office/powerpoint/2010/main" val="956783848"/>
+        <p14:creationId xmlns:p14="http://schemas.microsoft.com/office/powerpoint/2010/main" val="405191138"/>
       </p:ext>
     </p:extLst>
   </p:cSld>
